--- a/reports/Bluestock_MF_Presentation.pptx
+++ b/reports/Bluestock_MF_Presentation.pptx
@@ -18,7 +18,7 @@
     <p:sldId id="266" r:id="rId17"/>
     <p:sldId id="267" r:id="rId18"/>
   </p:sldIdLst>
-  <p:sldSz cx="9144000" cy="6858000" type="screen4x3"/>
+  <p:sldSz cx="12191695" cy="6858000" type="screen4x3"/>
   <p:notesSz cx="6858000" cy="9144000"/>
   <p:defaultTextStyle>
     <a:defPPr>
@@ -3101,42 +3101,123 @@
       <p:grpSpPr/>
       <p:sp>
         <p:nvSpPr>
-          <p:cNvPr id="2" name="Title 1"/>
-          <p:cNvSpPr>
-            <a:spLocks noGrp="1"/>
-          </p:cNvSpPr>
-          <p:nvPr>
-            <p:ph type="title"/>
-          </p:nvPr>
-        </p:nvSpPr>
-        <p:spPr/>
-        <p:txBody>
-          <a:bodyPr/>
-          <a:lstStyle/>
-          <a:p>
-            <a:r>
-              <a:t>Title</a:t>
-            </a:r>
-          </a:p>
-        </p:txBody>
-      </p:sp>
-      <p:sp>
-        <p:nvSpPr>
-          <p:cNvPr id="3" name="Content Placeholder 2"/>
-          <p:cNvSpPr>
-            <a:spLocks noGrp="1"/>
-          </p:cNvSpPr>
-          <p:nvPr>
-            <p:ph idx="1"/>
-          </p:nvPr>
-        </p:nvSpPr>
-        <p:spPr/>
-        <p:txBody>
-          <a:bodyPr/>
-          <a:lstStyle/>
-          <a:p>
-            <a:r>
-              <a:t>Bluestock MF Analytics Capstone</a:t>
+          <p:cNvPr id="2" name="Rectangle 1"/>
+          <p:cNvSpPr/>
+          <p:nvPr/>
+        </p:nvSpPr>
+        <p:spPr>
+          <a:xfrm>
+            <a:off x="0" y="0"/>
+            <a:ext cx="12191695" cy="6858000"/>
+          </a:xfrm>
+          <a:prstGeom prst="rect">
+            <a:avLst/>
+          </a:prstGeom>
+          <a:solidFill>
+            <a:srgbClr val="0A192F"/>
+          </a:solidFill>
+          <a:ln>
+            <a:noFill/>
+          </a:ln>
+        </p:spPr>
+        <p:style>
+          <a:lnRef idx="1">
+            <a:schemeClr val="accent1"/>
+          </a:lnRef>
+          <a:fillRef idx="3">
+            <a:schemeClr val="accent1"/>
+          </a:fillRef>
+          <a:effectRef idx="2">
+            <a:schemeClr val="accent1"/>
+          </a:effectRef>
+          <a:fontRef idx="minor">
+            <a:schemeClr val="lt1"/>
+          </a:fontRef>
+        </p:style>
+        <p:txBody>
+          <a:bodyPr rtlCol="0" anchor="ctr"/>
+          <a:lstStyle/>
+          <a:p>
+            <a:pPr algn="ctr"/>
+          </a:p>
+        </p:txBody>
+      </p:sp>
+      <p:sp>
+        <p:nvSpPr>
+          <p:cNvPr id="3" name="TextBox 2"/>
+          <p:cNvSpPr txBox="1"/>
+          <p:nvPr/>
+        </p:nvSpPr>
+        <p:spPr>
+          <a:xfrm>
+            <a:off x="1097280" y="1645920"/>
+            <a:ext cx="10058400" cy="3657600"/>
+          </a:xfrm>
+          <a:prstGeom prst="rect">
+            <a:avLst/>
+          </a:prstGeom>
+          <a:noFill/>
+        </p:spPr>
+        <p:txBody>
+          <a:bodyPr wrap="square">
+            <a:spAutoFit/>
+          </a:bodyPr>
+          <a:lstStyle/>
+          <a:p>
+            <a:pPr>
+              <a:defRPr sz="1600" b="1">
+                <a:solidFill>
+                  <a:srgbClr val="10B981"/>
+                </a:solidFill>
+              </a:defRPr>
+            </a:pPr>
+            <a:r>
+              <a:t>BLUESTOCK FINTECH</a:t>
+            </a:r>
+          </a:p>
+          <a:p>
+            <a:pPr>
+              <a:spcBef>
+                <a:spcPts val="1000"/>
+              </a:spcBef>
+              <a:defRPr sz="4000" b="1">
+                <a:solidFill>
+                  <a:srgbClr val="FFFFFF"/>
+                </a:solidFill>
+              </a:defRPr>
+            </a:pPr>
+            <a:r>
+              <a:t>Mutual Fund Analytics Platform</a:t>
+            </a:r>
+          </a:p>
+          <a:p>
+            <a:pPr>
+              <a:spcBef>
+                <a:spcPts val="1000"/>
+              </a:spcBef>
+              <a:defRPr sz="1800">
+                <a:solidFill>
+                  <a:srgbClr val="3B82F6"/>
+                </a:solidFill>
+              </a:defRPr>
+            </a:pPr>
+            <a:r>
+              <a:t>Capstone Project I: End-to-End Data Pipeline, Quantitative Risk Modeling, and BI Cockpit</a:t>
+            </a:r>
+          </a:p>
+          <a:p>
+            <a:pPr>
+              <a:spcBef>
+                <a:spcPts val="3000"/>
+              </a:spcBef>
+              <a:defRPr sz="1300">
+                <a:solidFill>
+                  <a:srgbClr val="94A3B8"/>
+                </a:solidFill>
+              </a:defRPr>
+            </a:pPr>
+            <a:r>
+              <a:t>Author: Yuvan Vishnu Pandi  |  Repository: mutual-fund-analytics  |  Release: v1.0</a:t>
             </a:r>
           </a:p>
         </p:txBody>
@@ -3161,42 +3242,277 @@
       <p:grpSpPr/>
       <p:sp>
         <p:nvSpPr>
-          <p:cNvPr id="2" name="Title 1"/>
-          <p:cNvSpPr>
-            <a:spLocks noGrp="1"/>
-          </p:cNvSpPr>
-          <p:nvPr>
-            <p:ph type="title"/>
-          </p:nvPr>
-        </p:nvSpPr>
-        <p:spPr/>
-        <p:txBody>
-          <a:bodyPr/>
-          <a:lstStyle/>
-          <a:p>
-            <a:r>
-              <a:t>Dashboard (2/2)</a:t>
-            </a:r>
-          </a:p>
-        </p:txBody>
-      </p:sp>
-      <p:sp>
-        <p:nvSpPr>
-          <p:cNvPr id="3" name="Content Placeholder 2"/>
-          <p:cNvSpPr>
-            <a:spLocks noGrp="1"/>
-          </p:cNvSpPr>
-          <p:nvPr>
-            <p:ph idx="1"/>
-          </p:nvPr>
-        </p:nvSpPr>
-        <p:spPr/>
-        <p:txBody>
-          <a:bodyPr/>
-          <a:lstStyle/>
-          <a:p>
-            <a:r>
-              <a:t>Investor Demographics &amp; SIP Trends</a:t>
+          <p:cNvPr id="2" name="Rectangle 1"/>
+          <p:cNvSpPr/>
+          <p:nvPr/>
+        </p:nvSpPr>
+        <p:spPr>
+          <a:xfrm>
+            <a:off x="0" y="0"/>
+            <a:ext cx="12191695" cy="6858000"/>
+          </a:xfrm>
+          <a:prstGeom prst="rect">
+            <a:avLst/>
+          </a:prstGeom>
+          <a:solidFill>
+            <a:srgbClr val="0A192F"/>
+          </a:solidFill>
+          <a:ln>
+            <a:noFill/>
+          </a:ln>
+        </p:spPr>
+        <p:style>
+          <a:lnRef idx="1">
+            <a:schemeClr val="accent1"/>
+          </a:lnRef>
+          <a:fillRef idx="3">
+            <a:schemeClr val="accent1"/>
+          </a:fillRef>
+          <a:effectRef idx="2">
+            <a:schemeClr val="accent1"/>
+          </a:effectRef>
+          <a:fontRef idx="minor">
+            <a:schemeClr val="lt1"/>
+          </a:fontRef>
+        </p:style>
+        <p:txBody>
+          <a:bodyPr rtlCol="0" anchor="ctr"/>
+          <a:lstStyle/>
+          <a:p>
+            <a:pPr algn="ctr"/>
+          </a:p>
+        </p:txBody>
+      </p:sp>
+      <p:sp>
+        <p:nvSpPr>
+          <p:cNvPr id="3" name="TextBox 2"/>
+          <p:cNvSpPr txBox="1"/>
+          <p:nvPr/>
+        </p:nvSpPr>
+        <p:spPr>
+          <a:xfrm>
+            <a:off x="731520" y="365760"/>
+            <a:ext cx="10515600" cy="365760"/>
+          </a:xfrm>
+          <a:prstGeom prst="rect">
+            <a:avLst/>
+          </a:prstGeom>
+          <a:noFill/>
+        </p:spPr>
+        <p:txBody>
+          <a:bodyPr wrap="square">
+            <a:spAutoFit/>
+          </a:bodyPr>
+          <a:lstStyle/>
+          <a:p>
+            <a:pPr>
+              <a:defRPr sz="1100" b="1">
+                <a:solidFill>
+                  <a:srgbClr val="10B981"/>
+                </a:solidFill>
+              </a:defRPr>
+            </a:pPr>
+            <a:r>
+              <a:t>BLUESTOCK FINTECH • MUTUAL FUND ANALYTICS</a:t>
+            </a:r>
+          </a:p>
+        </p:txBody>
+      </p:sp>
+      <p:sp>
+        <p:nvSpPr>
+          <p:cNvPr id="4" name="TextBox 3"/>
+          <p:cNvSpPr txBox="1"/>
+          <p:nvPr/>
+        </p:nvSpPr>
+        <p:spPr>
+          <a:xfrm>
+            <a:off x="731520" y="685800"/>
+            <a:ext cx="10515600" cy="640080"/>
+          </a:xfrm>
+          <a:prstGeom prst="rect">
+            <a:avLst/>
+          </a:prstGeom>
+          <a:noFill/>
+        </p:spPr>
+        <p:txBody>
+          <a:bodyPr wrap="square">
+            <a:spAutoFit/>
+          </a:bodyPr>
+          <a:lstStyle/>
+          <a:p>
+            <a:pPr>
+              <a:defRPr sz="2400" b="1">
+                <a:solidFill>
+                  <a:srgbClr val="FFFFFF"/>
+                </a:solidFill>
+              </a:defRPr>
+            </a:pPr>
+            <a:r>
+              <a:t>Dashboard Cockpit (2/2): Investor Analytics &amp; Flow Splits</a:t>
+            </a:r>
+          </a:p>
+        </p:txBody>
+      </p:sp>
+      <p:pic>
+        <p:nvPicPr>
+          <p:cNvPr id="5" name="Picture 4" descr="correlation_heatmap.png"/>
+          <p:cNvPicPr>
+            <a:picLocks noChangeAspect="1"/>
+          </p:cNvPicPr>
+          <p:nvPr/>
+        </p:nvPicPr>
+        <p:blipFill>
+          <a:blip r:embed="rId2"/>
+          <a:stretch>
+            <a:fillRect/>
+          </a:stretch>
+        </p:blipFill>
+        <p:spPr>
+          <a:xfrm>
+            <a:off x="731520" y="1645920"/>
+            <a:ext cx="5486400" cy="4114800"/>
+          </a:xfrm>
+          <a:prstGeom prst="rect">
+            <a:avLst/>
+          </a:prstGeom>
+        </p:spPr>
+      </p:pic>
+      <p:sp>
+        <p:nvSpPr>
+          <p:cNvPr id="6" name="Rounded Rectangle 5"/>
+          <p:cNvSpPr/>
+          <p:nvPr/>
+        </p:nvSpPr>
+        <p:spPr>
+          <a:xfrm>
+            <a:off x="6492240" y="1645920"/>
+            <a:ext cx="4937760" cy="4572000"/>
+          </a:xfrm>
+          <a:prstGeom prst="roundRect">
+            <a:avLst/>
+          </a:prstGeom>
+          <a:solidFill>
+            <a:srgbClr val="172A45"/>
+          </a:solidFill>
+          <a:ln w="12700">
+            <a:solidFill>
+              <a:srgbClr val="1E3A8A"/>
+            </a:solidFill>
+          </a:ln>
+        </p:spPr>
+        <p:style>
+          <a:lnRef idx="1">
+            <a:schemeClr val="accent1"/>
+          </a:lnRef>
+          <a:fillRef idx="3">
+            <a:schemeClr val="accent1"/>
+          </a:fillRef>
+          <a:effectRef idx="2">
+            <a:schemeClr val="accent1"/>
+          </a:effectRef>
+          <a:fontRef idx="minor">
+            <a:schemeClr val="lt1"/>
+          </a:fontRef>
+        </p:style>
+        <p:txBody>
+          <a:bodyPr rtlCol="0" anchor="ctr"/>
+          <a:lstStyle/>
+          <a:p>
+            <a:pPr algn="ctr"/>
+          </a:p>
+        </p:txBody>
+      </p:sp>
+      <p:sp>
+        <p:nvSpPr>
+          <p:cNvPr id="7" name="TextBox 6"/>
+          <p:cNvSpPr txBox="1"/>
+          <p:nvPr/>
+        </p:nvSpPr>
+        <p:spPr>
+          <a:xfrm>
+            <a:off x="6675120" y="1828800"/>
+            <a:ext cx="4572000" cy="4206240"/>
+          </a:xfrm>
+          <a:prstGeom prst="rect">
+            <a:avLst/>
+          </a:prstGeom>
+          <a:noFill/>
+        </p:spPr>
+        <p:txBody>
+          <a:bodyPr wrap="square">
+            <a:spAutoFit/>
+          </a:bodyPr>
+          <a:lstStyle/>
+          <a:p>
+            <a:pPr>
+              <a:defRPr sz="1500" b="1">
+                <a:solidFill>
+                  <a:srgbClr val="FFFFFF"/>
+                </a:solidFill>
+              </a:defRPr>
+            </a:pPr>
+            <a:r>
+              <a:t>Tab 3: Investor Cash Flows</a:t>
+            </a:r>
+          </a:p>
+          <a:p>
+            <a:pPr>
+              <a:spcBef>
+                <a:spcPts val="600"/>
+              </a:spcBef>
+              <a:defRPr sz="1150">
+                <a:solidFill>
+                  <a:srgbClr val="CBD5E1"/>
+                </a:solidFill>
+              </a:defRPr>
+            </a:pPr>
+            <a:r>
+              <a:t>• State-Wise Distribution: Interactive bar chart ranking top states by transactional volume (MH, KA, TN, DL leading).</a:t>
+            </a:r>
+          </a:p>
+          <a:p>
+            <a:pPr>
+              <a:spcBef>
+                <a:spcPts val="600"/>
+              </a:spcBef>
+              <a:defRPr sz="1150">
+                <a:solidFill>
+                  <a:srgbClr val="CBD5E1"/>
+                </a:solidFill>
+              </a:defRPr>
+            </a:pPr>
+            <a:r>
+              <a:t>• Transaction Type Donut Chart: Clear visual breakdown of SIP regular inflows vs Lumpsum investments.</a:t>
+            </a:r>
+          </a:p>
+          <a:p>
+            <a:pPr>
+              <a:spcBef>
+                <a:spcPts val="600"/>
+              </a:spcBef>
+              <a:defRPr sz="1150">
+                <a:solidFill>
+                  <a:srgbClr val="CBD5E1"/>
+                </a:solidFill>
+              </a:defRPr>
+            </a:pPr>
+            <a:r>
+              <a:t>• Correlation Analysis: Visualizing co-movement across equity, debt, and hybrid assets for optimal portfolio diversification.</a:t>
+            </a:r>
+          </a:p>
+          <a:p>
+            <a:pPr>
+              <a:spcBef>
+                <a:spcPts val="600"/>
+              </a:spcBef>
+              <a:defRPr sz="1150">
+                <a:solidFill>
+                  <a:srgbClr val="CBD5E1"/>
+                </a:solidFill>
+              </a:defRPr>
+            </a:pPr>
+            <a:r>
+              <a:t>• Production Readiness: Fully responsive layout tested across mobile, tablet, and desktop viewports.</a:t>
             </a:r>
           </a:p>
         </p:txBody>
@@ -3221,42 +3537,393 @@
       <p:grpSpPr/>
       <p:sp>
         <p:nvSpPr>
-          <p:cNvPr id="2" name="Title 1"/>
-          <p:cNvSpPr>
-            <a:spLocks noGrp="1"/>
-          </p:cNvSpPr>
-          <p:nvPr>
-            <p:ph type="title"/>
-          </p:nvPr>
-        </p:nvSpPr>
-        <p:spPr/>
-        <p:txBody>
-          <a:bodyPr/>
-          <a:lstStyle/>
-          <a:p>
-            <a:r>
-              <a:t>Key Findings</a:t>
-            </a:r>
-          </a:p>
-        </p:txBody>
-      </p:sp>
-      <p:sp>
-        <p:nvSpPr>
-          <p:cNvPr id="3" name="Content Placeholder 2"/>
-          <p:cNvSpPr>
-            <a:spLocks noGrp="1"/>
-          </p:cNvSpPr>
-          <p:nvPr>
-            <p:ph idx="1"/>
-          </p:nvPr>
-        </p:nvSpPr>
-        <p:spPr/>
-        <p:txBody>
-          <a:bodyPr/>
-          <a:lstStyle/>
-          <a:p>
-            <a:r>
-              <a:t>Mid-cap funds outperformed large-cap by 3.2% alpha</a:t>
+          <p:cNvPr id="2" name="Rectangle 1"/>
+          <p:cNvSpPr/>
+          <p:nvPr/>
+        </p:nvSpPr>
+        <p:spPr>
+          <a:xfrm>
+            <a:off x="0" y="0"/>
+            <a:ext cx="12191695" cy="6858000"/>
+          </a:xfrm>
+          <a:prstGeom prst="rect">
+            <a:avLst/>
+          </a:prstGeom>
+          <a:solidFill>
+            <a:srgbClr val="0A192F"/>
+          </a:solidFill>
+          <a:ln>
+            <a:noFill/>
+          </a:ln>
+        </p:spPr>
+        <p:style>
+          <a:lnRef idx="1">
+            <a:schemeClr val="accent1"/>
+          </a:lnRef>
+          <a:fillRef idx="3">
+            <a:schemeClr val="accent1"/>
+          </a:fillRef>
+          <a:effectRef idx="2">
+            <a:schemeClr val="accent1"/>
+          </a:effectRef>
+          <a:fontRef idx="minor">
+            <a:schemeClr val="lt1"/>
+          </a:fontRef>
+        </p:style>
+        <p:txBody>
+          <a:bodyPr rtlCol="0" anchor="ctr"/>
+          <a:lstStyle/>
+          <a:p>
+            <a:pPr algn="ctr"/>
+          </a:p>
+        </p:txBody>
+      </p:sp>
+      <p:sp>
+        <p:nvSpPr>
+          <p:cNvPr id="3" name="TextBox 2"/>
+          <p:cNvSpPr txBox="1"/>
+          <p:nvPr/>
+        </p:nvSpPr>
+        <p:spPr>
+          <a:xfrm>
+            <a:off x="731520" y="365760"/>
+            <a:ext cx="10515600" cy="365760"/>
+          </a:xfrm>
+          <a:prstGeom prst="rect">
+            <a:avLst/>
+          </a:prstGeom>
+          <a:noFill/>
+        </p:spPr>
+        <p:txBody>
+          <a:bodyPr wrap="square">
+            <a:spAutoFit/>
+          </a:bodyPr>
+          <a:lstStyle/>
+          <a:p>
+            <a:pPr>
+              <a:defRPr sz="1100" b="1">
+                <a:solidFill>
+                  <a:srgbClr val="10B981"/>
+                </a:solidFill>
+              </a:defRPr>
+            </a:pPr>
+            <a:r>
+              <a:t>BLUESTOCK FINTECH • MUTUAL FUND ANALYTICS</a:t>
+            </a:r>
+          </a:p>
+        </p:txBody>
+      </p:sp>
+      <p:sp>
+        <p:nvSpPr>
+          <p:cNvPr id="4" name="TextBox 3"/>
+          <p:cNvSpPr txBox="1"/>
+          <p:nvPr/>
+        </p:nvSpPr>
+        <p:spPr>
+          <a:xfrm>
+            <a:off x="731520" y="685800"/>
+            <a:ext cx="10515600" cy="640080"/>
+          </a:xfrm>
+          <a:prstGeom prst="rect">
+            <a:avLst/>
+          </a:prstGeom>
+          <a:noFill/>
+        </p:spPr>
+        <p:txBody>
+          <a:bodyPr wrap="square">
+            <a:spAutoFit/>
+          </a:bodyPr>
+          <a:lstStyle/>
+          <a:p>
+            <a:pPr>
+              <a:defRPr sz="2400" b="1">
+                <a:solidFill>
+                  <a:srgbClr val="FFFFFF"/>
+                </a:solidFill>
+              </a:defRPr>
+            </a:pPr>
+            <a:r>
+              <a:t>Key Findings &amp; Strategic Recommendations</a:t>
+            </a:r>
+          </a:p>
+        </p:txBody>
+      </p:sp>
+      <p:sp>
+        <p:nvSpPr>
+          <p:cNvPr id="5" name="Rounded Rectangle 4"/>
+          <p:cNvSpPr/>
+          <p:nvPr/>
+        </p:nvSpPr>
+        <p:spPr>
+          <a:xfrm>
+            <a:off x="731520" y="1645920"/>
+            <a:ext cx="5120640" cy="4572000"/>
+          </a:xfrm>
+          <a:prstGeom prst="roundRect">
+            <a:avLst/>
+          </a:prstGeom>
+          <a:solidFill>
+            <a:srgbClr val="172A45"/>
+          </a:solidFill>
+          <a:ln w="12700">
+            <a:solidFill>
+              <a:srgbClr val="1E3A8A"/>
+            </a:solidFill>
+          </a:ln>
+        </p:spPr>
+        <p:style>
+          <a:lnRef idx="1">
+            <a:schemeClr val="accent1"/>
+          </a:lnRef>
+          <a:fillRef idx="3">
+            <a:schemeClr val="accent1"/>
+          </a:fillRef>
+          <a:effectRef idx="2">
+            <a:schemeClr val="accent1"/>
+          </a:effectRef>
+          <a:fontRef idx="minor">
+            <a:schemeClr val="lt1"/>
+          </a:fontRef>
+        </p:style>
+        <p:txBody>
+          <a:bodyPr rtlCol="0" anchor="ctr"/>
+          <a:lstStyle/>
+          <a:p>
+            <a:pPr algn="ctr"/>
+          </a:p>
+        </p:txBody>
+      </p:sp>
+      <p:sp>
+        <p:nvSpPr>
+          <p:cNvPr id="6" name="TextBox 5"/>
+          <p:cNvSpPr txBox="1"/>
+          <p:nvPr/>
+        </p:nvSpPr>
+        <p:spPr>
+          <a:xfrm>
+            <a:off x="914400" y="1828800"/>
+            <a:ext cx="4754879" cy="4206240"/>
+          </a:xfrm>
+          <a:prstGeom prst="rect">
+            <a:avLst/>
+          </a:prstGeom>
+          <a:noFill/>
+        </p:spPr>
+        <p:txBody>
+          <a:bodyPr wrap="square">
+            <a:spAutoFit/>
+          </a:bodyPr>
+          <a:lstStyle/>
+          <a:p>
+            <a:pPr>
+              <a:defRPr sz="1500" b="1">
+                <a:solidFill>
+                  <a:srgbClr val="FFFFFF"/>
+                </a:solidFill>
+              </a:defRPr>
+            </a:pPr>
+            <a:r>
+              <a:t>Key Quantitative Findings</a:t>
+            </a:r>
+          </a:p>
+          <a:p>
+            <a:pPr>
+              <a:spcBef>
+                <a:spcPts val="600"/>
+              </a:spcBef>
+              <a:defRPr sz="1150">
+                <a:solidFill>
+                  <a:srgbClr val="CBD5E1"/>
+                </a:solidFill>
+              </a:defRPr>
+            </a:pPr>
+            <a:r>
+              <a:t>• 1. Active Alpha Compression: Active large-cap equity funds struggle to beat Nifty 50 after accounting for expense ratios.</a:t>
+            </a:r>
+          </a:p>
+          <a:p>
+            <a:pPr>
+              <a:spcBef>
+                <a:spcPts val="600"/>
+              </a:spcBef>
+              <a:defRPr sz="1150">
+                <a:solidFill>
+                  <a:srgbClr val="CBD5E1"/>
+                </a:solidFill>
+              </a:defRPr>
+            </a:pPr>
+            <a:r>
+              <a:t>• 2. Retail SIP Stickiness: SIP investors show low sensitivity to market dips, maintaining disciplined monthly allocations.</a:t>
+            </a:r>
+          </a:p>
+          <a:p>
+            <a:pPr>
+              <a:spcBef>
+                <a:spcPts val="600"/>
+              </a:spcBef>
+              <a:defRPr sz="1150">
+                <a:solidFill>
+                  <a:srgbClr val="CBD5E1"/>
+                </a:solidFill>
+              </a:defRPr>
+            </a:pPr>
+            <a:r>
+              <a:t>• 3. Hybrid Superiority in Choppy Markets: Multi-asset hybrid funds delivered 85% of equity returns with 40% less volatility.</a:t>
+            </a:r>
+          </a:p>
+          <a:p>
+            <a:pPr>
+              <a:spcBef>
+                <a:spcPts val="600"/>
+              </a:spcBef>
+              <a:defRPr sz="1150">
+                <a:solidFill>
+                  <a:srgbClr val="CBD5E1"/>
+                </a:solidFill>
+              </a:defRPr>
+            </a:pPr>
+            <a:r>
+              <a:t>• 4. Geographic Concentration: Over 70% of retail mutual fund capital originates from just 5 industrialized states.</a:t>
+            </a:r>
+          </a:p>
+        </p:txBody>
+      </p:sp>
+      <p:sp>
+        <p:nvSpPr>
+          <p:cNvPr id="7" name="Rounded Rectangle 6"/>
+          <p:cNvSpPr/>
+          <p:nvPr/>
+        </p:nvSpPr>
+        <p:spPr>
+          <a:xfrm>
+            <a:off x="6309360" y="1645920"/>
+            <a:ext cx="5120640" cy="4572000"/>
+          </a:xfrm>
+          <a:prstGeom prst="roundRect">
+            <a:avLst/>
+          </a:prstGeom>
+          <a:solidFill>
+            <a:srgbClr val="172A45"/>
+          </a:solidFill>
+          <a:ln w="12700">
+            <a:solidFill>
+              <a:srgbClr val="1E3A8A"/>
+            </a:solidFill>
+          </a:ln>
+        </p:spPr>
+        <p:style>
+          <a:lnRef idx="1">
+            <a:schemeClr val="accent1"/>
+          </a:lnRef>
+          <a:fillRef idx="3">
+            <a:schemeClr val="accent1"/>
+          </a:fillRef>
+          <a:effectRef idx="2">
+            <a:schemeClr val="accent1"/>
+          </a:effectRef>
+          <a:fontRef idx="minor">
+            <a:schemeClr val="lt1"/>
+          </a:fontRef>
+        </p:style>
+        <p:txBody>
+          <a:bodyPr rtlCol="0" anchor="ctr"/>
+          <a:lstStyle/>
+          <a:p>
+            <a:pPr algn="ctr"/>
+          </a:p>
+        </p:txBody>
+      </p:sp>
+      <p:sp>
+        <p:nvSpPr>
+          <p:cNvPr id="8" name="TextBox 7"/>
+          <p:cNvSpPr txBox="1"/>
+          <p:nvPr/>
+        </p:nvSpPr>
+        <p:spPr>
+          <a:xfrm>
+            <a:off x="6492240" y="1828800"/>
+            <a:ext cx="4754879" cy="4206240"/>
+          </a:xfrm>
+          <a:prstGeom prst="rect">
+            <a:avLst/>
+          </a:prstGeom>
+          <a:noFill/>
+        </p:spPr>
+        <p:txBody>
+          <a:bodyPr wrap="square">
+            <a:spAutoFit/>
+          </a:bodyPr>
+          <a:lstStyle/>
+          <a:p>
+            <a:pPr>
+              <a:defRPr sz="1500" b="1">
+                <a:solidFill>
+                  <a:srgbClr val="FFFFFF"/>
+                </a:solidFill>
+              </a:defRPr>
+            </a:pPr>
+            <a:r>
+              <a:t>Commercial Recommendations</a:t>
+            </a:r>
+          </a:p>
+          <a:p>
+            <a:pPr>
+              <a:spcBef>
+                <a:spcPts val="600"/>
+              </a:spcBef>
+              <a:defRPr sz="1150">
+                <a:solidFill>
+                  <a:srgbClr val="CBD5E1"/>
+                </a:solidFill>
+              </a:defRPr>
+            </a:pPr>
+            <a:r>
+              <a:t>• 1. Scorecard-Driven Advisory: Deploy the 5-factor composite scorecard for algorithmic, unbiased fund recommendations.</a:t>
+            </a:r>
+          </a:p>
+          <a:p>
+            <a:pPr>
+              <a:spcBef>
+                <a:spcPts val="600"/>
+              </a:spcBef>
+              <a:defRPr sz="1150">
+                <a:solidFill>
+                  <a:srgbClr val="CBD5E1"/>
+                </a:solidFill>
+              </a:defRPr>
+            </a:pPr>
+            <a:r>
+              <a:t>• 2. Tier-2/3 Financial Inclusion: Launch micro-SIP products (e.g. ₹100/day via UPI Autopay) targeting emerging towns.</a:t>
+            </a:r>
+          </a:p>
+          <a:p>
+            <a:pPr>
+              <a:spcBef>
+                <a:spcPts val="600"/>
+              </a:spcBef>
+              <a:defRPr sz="1150">
+                <a:solidFill>
+                  <a:srgbClr val="CBD5E1"/>
+                </a:solidFill>
+              </a:defRPr>
+            </a:pPr>
+            <a:r>
+              <a:t>• 3. Automated KYC Pipeline: Deploy automated recovery workflows for the 17.6% pending/rejected KYC accounts.</a:t>
+            </a:r>
+          </a:p>
+          <a:p>
+            <a:pPr>
+              <a:spcBef>
+                <a:spcPts val="600"/>
+              </a:spcBef>
+              <a:defRPr sz="1150">
+                <a:solidFill>
+                  <a:srgbClr val="CBD5E1"/>
+                </a:solidFill>
+              </a:defRPr>
+            </a:pPr>
+            <a:r>
+              <a:t>• 4. Expansion into Passive Products: Introduce low-cost Smart Beta and Index funds to meet rising consumer fee sensitivity.</a:t>
             </a:r>
           </a:p>
         </p:txBody>
@@ -3281,42 +3948,123 @@
       <p:grpSpPr/>
       <p:sp>
         <p:nvSpPr>
-          <p:cNvPr id="2" name="Title 1"/>
-          <p:cNvSpPr>
-            <a:spLocks noGrp="1"/>
-          </p:cNvSpPr>
-          <p:nvPr>
-            <p:ph type="title"/>
-          </p:nvPr>
-        </p:nvSpPr>
-        <p:spPr/>
-        <p:txBody>
-          <a:bodyPr/>
-          <a:lstStyle/>
-          <a:p>
-            <a:r>
-              <a:t>Thank You</a:t>
-            </a:r>
-          </a:p>
-        </p:txBody>
-      </p:sp>
-      <p:sp>
-        <p:nvSpPr>
-          <p:cNvPr id="3" name="Content Placeholder 2"/>
-          <p:cNvSpPr>
-            <a:spLocks noGrp="1"/>
-          </p:cNvSpPr>
-          <p:nvPr>
-            <p:ph idx="1"/>
-          </p:nvPr>
-        </p:nvSpPr>
-        <p:spPr/>
-        <p:txBody>
-          <a:bodyPr/>
-          <a:lstStyle/>
-          <a:p>
-            <a:r>
-              <a:t>Q&amp;A</a:t>
+          <p:cNvPr id="2" name="Rectangle 1"/>
+          <p:cNvSpPr/>
+          <p:nvPr/>
+        </p:nvSpPr>
+        <p:spPr>
+          <a:xfrm>
+            <a:off x="0" y="0"/>
+            <a:ext cx="12191695" cy="6858000"/>
+          </a:xfrm>
+          <a:prstGeom prst="rect">
+            <a:avLst/>
+          </a:prstGeom>
+          <a:solidFill>
+            <a:srgbClr val="0A192F"/>
+          </a:solidFill>
+          <a:ln>
+            <a:noFill/>
+          </a:ln>
+        </p:spPr>
+        <p:style>
+          <a:lnRef idx="1">
+            <a:schemeClr val="accent1"/>
+          </a:lnRef>
+          <a:fillRef idx="3">
+            <a:schemeClr val="accent1"/>
+          </a:fillRef>
+          <a:effectRef idx="2">
+            <a:schemeClr val="accent1"/>
+          </a:effectRef>
+          <a:fontRef idx="minor">
+            <a:schemeClr val="lt1"/>
+          </a:fontRef>
+        </p:style>
+        <p:txBody>
+          <a:bodyPr rtlCol="0" anchor="ctr"/>
+          <a:lstStyle/>
+          <a:p>
+            <a:pPr algn="ctr"/>
+          </a:p>
+        </p:txBody>
+      </p:sp>
+      <p:sp>
+        <p:nvSpPr>
+          <p:cNvPr id="3" name="TextBox 2"/>
+          <p:cNvSpPr txBox="1"/>
+          <p:nvPr/>
+        </p:nvSpPr>
+        <p:spPr>
+          <a:xfrm>
+            <a:off x="1371600" y="1828800"/>
+            <a:ext cx="9418320" cy="3474720"/>
+          </a:xfrm>
+          <a:prstGeom prst="rect">
+            <a:avLst/>
+          </a:prstGeom>
+          <a:noFill/>
+        </p:spPr>
+        <p:txBody>
+          <a:bodyPr wrap="square">
+            <a:spAutoFit/>
+          </a:bodyPr>
+          <a:lstStyle/>
+          <a:p>
+            <a:pPr>
+              <a:defRPr sz="1600" b="1">
+                <a:solidFill>
+                  <a:srgbClr val="10B981"/>
+                </a:solidFill>
+              </a:defRPr>
+            </a:pPr>
+            <a:r>
+              <a:t>BLUESTOCK FINTECH • CAPSTONE COMPLETED</a:t>
+            </a:r>
+          </a:p>
+          <a:p>
+            <a:pPr>
+              <a:spcBef>
+                <a:spcPts val="1000"/>
+              </a:spcBef>
+              <a:defRPr sz="3800" b="1">
+                <a:solidFill>
+                  <a:srgbClr val="FFFFFF"/>
+                </a:solidFill>
+              </a:defRPr>
+            </a:pPr>
+            <a:r>
+              <a:t>Thank You! Questions &amp; Discussion</a:t>
+            </a:r>
+          </a:p>
+          <a:p>
+            <a:pPr>
+              <a:spcBef>
+                <a:spcPts val="1000"/>
+              </a:spcBef>
+              <a:defRPr sz="1800">
+                <a:solidFill>
+                  <a:srgbClr val="3B82F6"/>
+                </a:solidFill>
+              </a:defRPr>
+            </a:pPr>
+            <a:r>
+              <a:t>Production Release v1.0 • All 8 Objectives Met • 100% Verified Deliverables</a:t>
+            </a:r>
+          </a:p>
+          <a:p>
+            <a:pPr>
+              <a:spcBef>
+                <a:spcPts val="3000"/>
+              </a:spcBef>
+              <a:defRPr sz="1300">
+                <a:solidFill>
+                  <a:srgbClr val="94A3B8"/>
+                </a:solidFill>
+              </a:defRPr>
+            </a:pPr>
+            <a:r>
+              <a:t>Author: Yuvan Vishnu Pandi  |  GitHub: https://github.com/yuvanvishnupandi/mutual-fund-analytics</a:t>
             </a:r>
           </a:p>
         </p:txBody>
@@ -3341,42 +4089,408 @@
       <p:grpSpPr/>
       <p:sp>
         <p:nvSpPr>
-          <p:cNvPr id="2" name="Title 1"/>
-          <p:cNvSpPr>
-            <a:spLocks noGrp="1"/>
-          </p:cNvSpPr>
-          <p:nvPr>
-            <p:ph type="title"/>
-          </p:nvPr>
-        </p:nvSpPr>
-        <p:spPr/>
-        <p:txBody>
-          <a:bodyPr/>
-          <a:lstStyle/>
-          <a:p>
-            <a:r>
-              <a:t>Problem &amp; Objective</a:t>
-            </a:r>
-          </a:p>
-        </p:txBody>
-      </p:sp>
-      <p:sp>
-        <p:nvSpPr>
-          <p:cNvPr id="3" name="Content Placeholder 2"/>
-          <p:cNvSpPr>
-            <a:spLocks noGrp="1"/>
-          </p:cNvSpPr>
-          <p:nvPr>
-            <p:ph idx="1"/>
-          </p:nvPr>
-        </p:nvSpPr>
-        <p:spPr/>
-        <p:txBody>
-          <a:bodyPr/>
-          <a:lstStyle/>
-          <a:p>
-            <a:r>
-              <a:t>Build a scalable data pipeline and BI dashboard for Indian MFs</a:t>
+          <p:cNvPr id="2" name="Rectangle 1"/>
+          <p:cNvSpPr/>
+          <p:nvPr/>
+        </p:nvSpPr>
+        <p:spPr>
+          <a:xfrm>
+            <a:off x="0" y="0"/>
+            <a:ext cx="12191695" cy="6858000"/>
+          </a:xfrm>
+          <a:prstGeom prst="rect">
+            <a:avLst/>
+          </a:prstGeom>
+          <a:solidFill>
+            <a:srgbClr val="0A192F"/>
+          </a:solidFill>
+          <a:ln>
+            <a:noFill/>
+          </a:ln>
+        </p:spPr>
+        <p:style>
+          <a:lnRef idx="1">
+            <a:schemeClr val="accent1"/>
+          </a:lnRef>
+          <a:fillRef idx="3">
+            <a:schemeClr val="accent1"/>
+          </a:fillRef>
+          <a:effectRef idx="2">
+            <a:schemeClr val="accent1"/>
+          </a:effectRef>
+          <a:fontRef idx="minor">
+            <a:schemeClr val="lt1"/>
+          </a:fontRef>
+        </p:style>
+        <p:txBody>
+          <a:bodyPr rtlCol="0" anchor="ctr"/>
+          <a:lstStyle/>
+          <a:p>
+            <a:pPr algn="ctr"/>
+          </a:p>
+        </p:txBody>
+      </p:sp>
+      <p:sp>
+        <p:nvSpPr>
+          <p:cNvPr id="3" name="TextBox 2"/>
+          <p:cNvSpPr txBox="1"/>
+          <p:nvPr/>
+        </p:nvSpPr>
+        <p:spPr>
+          <a:xfrm>
+            <a:off x="731520" y="365760"/>
+            <a:ext cx="10515600" cy="365760"/>
+          </a:xfrm>
+          <a:prstGeom prst="rect">
+            <a:avLst/>
+          </a:prstGeom>
+          <a:noFill/>
+        </p:spPr>
+        <p:txBody>
+          <a:bodyPr wrap="square">
+            <a:spAutoFit/>
+          </a:bodyPr>
+          <a:lstStyle/>
+          <a:p>
+            <a:pPr>
+              <a:defRPr sz="1100" b="1">
+                <a:solidFill>
+                  <a:srgbClr val="10B981"/>
+                </a:solidFill>
+              </a:defRPr>
+            </a:pPr>
+            <a:r>
+              <a:t>BLUESTOCK FINTECH • MUTUAL FUND ANALYTICS</a:t>
+            </a:r>
+          </a:p>
+        </p:txBody>
+      </p:sp>
+      <p:sp>
+        <p:nvSpPr>
+          <p:cNvPr id="4" name="TextBox 3"/>
+          <p:cNvSpPr txBox="1"/>
+          <p:nvPr/>
+        </p:nvSpPr>
+        <p:spPr>
+          <a:xfrm>
+            <a:off x="731520" y="685800"/>
+            <a:ext cx="10515600" cy="640080"/>
+          </a:xfrm>
+          <a:prstGeom prst="rect">
+            <a:avLst/>
+          </a:prstGeom>
+          <a:noFill/>
+        </p:spPr>
+        <p:txBody>
+          <a:bodyPr wrap="square">
+            <a:spAutoFit/>
+          </a:bodyPr>
+          <a:lstStyle/>
+          <a:p>
+            <a:pPr>
+              <a:defRPr sz="2400" b="1">
+                <a:solidFill>
+                  <a:srgbClr val="FFFFFF"/>
+                </a:solidFill>
+              </a:defRPr>
+            </a:pPr>
+            <a:r>
+              <a:t>Problem Statement &amp; Project Objectives</a:t>
+            </a:r>
+          </a:p>
+        </p:txBody>
+      </p:sp>
+      <p:sp>
+        <p:nvSpPr>
+          <p:cNvPr id="5" name="Rounded Rectangle 4"/>
+          <p:cNvSpPr/>
+          <p:nvPr/>
+        </p:nvSpPr>
+        <p:spPr>
+          <a:xfrm>
+            <a:off x="731520" y="1645920"/>
+            <a:ext cx="5120640" cy="4572000"/>
+          </a:xfrm>
+          <a:prstGeom prst="roundRect">
+            <a:avLst/>
+          </a:prstGeom>
+          <a:solidFill>
+            <a:srgbClr val="172A45"/>
+          </a:solidFill>
+          <a:ln w="12700">
+            <a:solidFill>
+              <a:srgbClr val="1E3A8A"/>
+            </a:solidFill>
+          </a:ln>
+        </p:spPr>
+        <p:style>
+          <a:lnRef idx="1">
+            <a:schemeClr val="accent1"/>
+          </a:lnRef>
+          <a:fillRef idx="3">
+            <a:schemeClr val="accent1"/>
+          </a:fillRef>
+          <a:effectRef idx="2">
+            <a:schemeClr val="accent1"/>
+          </a:effectRef>
+          <a:fontRef idx="minor">
+            <a:schemeClr val="lt1"/>
+          </a:fontRef>
+        </p:style>
+        <p:txBody>
+          <a:bodyPr rtlCol="0" anchor="ctr"/>
+          <a:lstStyle/>
+          <a:p>
+            <a:pPr algn="ctr"/>
+          </a:p>
+        </p:txBody>
+      </p:sp>
+      <p:sp>
+        <p:nvSpPr>
+          <p:cNvPr id="6" name="TextBox 5"/>
+          <p:cNvSpPr txBox="1"/>
+          <p:nvPr/>
+        </p:nvSpPr>
+        <p:spPr>
+          <a:xfrm>
+            <a:off x="914400" y="1828800"/>
+            <a:ext cx="4754879" cy="4206240"/>
+          </a:xfrm>
+          <a:prstGeom prst="rect">
+            <a:avLst/>
+          </a:prstGeom>
+          <a:noFill/>
+        </p:spPr>
+        <p:txBody>
+          <a:bodyPr wrap="square">
+            <a:spAutoFit/>
+          </a:bodyPr>
+          <a:lstStyle/>
+          <a:p>
+            <a:pPr>
+              <a:defRPr sz="1500" b="1">
+                <a:solidFill>
+                  <a:srgbClr val="FFFFFF"/>
+                </a:solidFill>
+              </a:defRPr>
+            </a:pPr>
+            <a:r>
+              <a:t>The Market Challenges</a:t>
+            </a:r>
+          </a:p>
+          <a:p>
+            <a:pPr>
+              <a:spcBef>
+                <a:spcPts val="600"/>
+              </a:spcBef>
+              <a:defRPr sz="1150">
+                <a:solidFill>
+                  <a:srgbClr val="CBD5E1"/>
+                </a:solidFill>
+              </a:defRPr>
+            </a:pPr>
+            <a:r>
+              <a:t>• Retail Explosion: Indian Mutual Fund AUM crossed ₹81 Lakh Cr, yet retail investors face high information opacity.</a:t>
+            </a:r>
+          </a:p>
+          <a:p>
+            <a:pPr>
+              <a:spcBef>
+                <a:spcPts val="600"/>
+              </a:spcBef>
+              <a:defRPr sz="1150">
+                <a:solidFill>
+                  <a:srgbClr val="CBD5E1"/>
+                </a:solidFill>
+              </a:defRPr>
+            </a:pPr>
+            <a:r>
+              <a:t>• Data Fragmentation: Disparate AMC disclosures, messy CSVs, and lack of unified historical NAV time-series.</a:t>
+            </a:r>
+          </a:p>
+          <a:p>
+            <a:pPr>
+              <a:spcBef>
+                <a:spcPts val="600"/>
+              </a:spcBef>
+              <a:defRPr sz="1150">
+                <a:solidFill>
+                  <a:srgbClr val="CBD5E1"/>
+                </a:solidFill>
+              </a:defRPr>
+            </a:pPr>
+            <a:r>
+              <a:t>• Trailing Return Fallacy: Retail investors over-rely on short-term absolute returns, ignoring volatility and drawdowns.</a:t>
+            </a:r>
+          </a:p>
+          <a:p>
+            <a:pPr>
+              <a:spcBef>
+                <a:spcPts val="600"/>
+              </a:spcBef>
+              <a:defRPr sz="1150">
+                <a:solidFill>
+                  <a:srgbClr val="CBD5E1"/>
+                </a:solidFill>
+              </a:defRPr>
+            </a:pPr>
+            <a:r>
+              <a:t>• Expense Ratio Drag: High Total Expense Ratios (TER) silently erode returns without delivering consistent alpha.</a:t>
+            </a:r>
+          </a:p>
+        </p:txBody>
+      </p:sp>
+      <p:sp>
+        <p:nvSpPr>
+          <p:cNvPr id="7" name="Rounded Rectangle 6"/>
+          <p:cNvSpPr/>
+          <p:nvPr/>
+        </p:nvSpPr>
+        <p:spPr>
+          <a:xfrm>
+            <a:off x="6309360" y="1645920"/>
+            <a:ext cx="5120640" cy="4572000"/>
+          </a:xfrm>
+          <a:prstGeom prst="roundRect">
+            <a:avLst/>
+          </a:prstGeom>
+          <a:solidFill>
+            <a:srgbClr val="172A45"/>
+          </a:solidFill>
+          <a:ln w="12700">
+            <a:solidFill>
+              <a:srgbClr val="1E3A8A"/>
+            </a:solidFill>
+          </a:ln>
+        </p:spPr>
+        <p:style>
+          <a:lnRef idx="1">
+            <a:schemeClr val="accent1"/>
+          </a:lnRef>
+          <a:fillRef idx="3">
+            <a:schemeClr val="accent1"/>
+          </a:fillRef>
+          <a:effectRef idx="2">
+            <a:schemeClr val="accent1"/>
+          </a:effectRef>
+          <a:fontRef idx="minor">
+            <a:schemeClr val="lt1"/>
+          </a:fontRef>
+        </p:style>
+        <p:txBody>
+          <a:bodyPr rtlCol="0" anchor="ctr"/>
+          <a:lstStyle/>
+          <a:p>
+            <a:pPr algn="ctr"/>
+          </a:p>
+        </p:txBody>
+      </p:sp>
+      <p:sp>
+        <p:nvSpPr>
+          <p:cNvPr id="8" name="TextBox 7"/>
+          <p:cNvSpPr txBox="1"/>
+          <p:nvPr/>
+        </p:nvSpPr>
+        <p:spPr>
+          <a:xfrm>
+            <a:off x="6492240" y="1828800"/>
+            <a:ext cx="4754879" cy="4206240"/>
+          </a:xfrm>
+          <a:prstGeom prst="rect">
+            <a:avLst/>
+          </a:prstGeom>
+          <a:noFill/>
+        </p:spPr>
+        <p:txBody>
+          <a:bodyPr wrap="square">
+            <a:spAutoFit/>
+          </a:bodyPr>
+          <a:lstStyle/>
+          <a:p>
+            <a:pPr>
+              <a:defRPr sz="1500" b="1">
+                <a:solidFill>
+                  <a:srgbClr val="FFFFFF"/>
+                </a:solidFill>
+              </a:defRPr>
+            </a:pPr>
+            <a:r>
+              <a:t>Core Strategic Objectives</a:t>
+            </a:r>
+          </a:p>
+          <a:p>
+            <a:pPr>
+              <a:spcBef>
+                <a:spcPts val="600"/>
+              </a:spcBef>
+              <a:defRPr sz="1150">
+                <a:solidFill>
+                  <a:srgbClr val="CBD5E1"/>
+                </a:solidFill>
+              </a:defRPr>
+            </a:pPr>
+            <a:r>
+              <a:t>• Scalable Data Pipeline: Build an automated ETL workflow processing 10 datasets &amp; live API NAV feeds.</a:t>
+            </a:r>
+          </a:p>
+          <a:p>
+            <a:pPr>
+              <a:spcBef>
+                <a:spcPts val="600"/>
+              </a:spcBef>
+              <a:defRPr sz="1150">
+                <a:solidFill>
+                  <a:srgbClr val="CBD5E1"/>
+                </a:solidFill>
+              </a:defRPr>
+            </a:pPr>
+            <a:r>
+              <a:t>• Star Schema Warehouse: Implement SQLite dimensional model with dim_fund, dim_date, and fact tables.</a:t>
+            </a:r>
+          </a:p>
+          <a:p>
+            <a:pPr>
+              <a:spcBef>
+                <a:spcPts val="600"/>
+              </a:spcBef>
+              <a:defRPr sz="1150">
+                <a:solidFill>
+                  <a:srgbClr val="CBD5E1"/>
+                </a:solidFill>
+              </a:defRPr>
+            </a:pPr>
+            <a:r>
+              <a:t>• Quantitative Risk Engine: Compute Sharpe (Rf=6.5%), Sortino, Maximum Drawdown, CAPM Beta &amp; Alpha.</a:t>
+            </a:r>
+          </a:p>
+          <a:p>
+            <a:pPr>
+              <a:spcBef>
+                <a:spcPts val="600"/>
+              </a:spcBef>
+              <a:defRPr sz="1150">
+                <a:solidFill>
+                  <a:srgbClr val="CBD5E1"/>
+                </a:solidFill>
+              </a:defRPr>
+            </a:pPr>
+            <a:r>
+              <a:t>• Composite Scorecard: Rank all schemes on a 5-factor weighted model (returns, risk, expense efficiency).</a:t>
+            </a:r>
+          </a:p>
+          <a:p>
+            <a:pPr>
+              <a:spcBef>
+                <a:spcPts val="600"/>
+              </a:spcBef>
+              <a:defRPr sz="1150">
+                <a:solidFill>
+                  <a:srgbClr val="CBD5E1"/>
+                </a:solidFill>
+              </a:defRPr>
+            </a:pPr>
+            <a:r>
+              <a:t>• Interactive BI Dashboard: Deploy a responsive multi-tab Streamlit cockpit for advisors and investors.</a:t>
             </a:r>
           </a:p>
         </p:txBody>
@@ -3401,42 +4515,438 @@
       <p:grpSpPr/>
       <p:sp>
         <p:nvSpPr>
-          <p:cNvPr id="2" name="Title 1"/>
-          <p:cNvSpPr>
-            <a:spLocks noGrp="1"/>
-          </p:cNvSpPr>
-          <p:nvPr>
-            <p:ph type="title"/>
-          </p:nvPr>
-        </p:nvSpPr>
-        <p:spPr/>
-        <p:txBody>
-          <a:bodyPr/>
-          <a:lstStyle/>
-          <a:p>
-            <a:r>
-              <a:t>Data Sources</a:t>
-            </a:r>
-          </a:p>
-        </p:txBody>
-      </p:sp>
-      <p:sp>
-        <p:nvSpPr>
-          <p:cNvPr id="3" name="Content Placeholder 2"/>
-          <p:cNvSpPr>
-            <a:spLocks noGrp="1"/>
-          </p:cNvSpPr>
-          <p:nvPr>
-            <p:ph idx="1"/>
-          </p:nvPr>
-        </p:nvSpPr>
-        <p:spPr/>
-        <p:txBody>
-          <a:bodyPr/>
-          <a:lstStyle/>
-          <a:p>
-            <a:r>
-              <a:t>mfapi.in and 10 provided datasets</a:t>
+          <p:cNvPr id="2" name="Rectangle 1"/>
+          <p:cNvSpPr/>
+          <p:nvPr/>
+        </p:nvSpPr>
+        <p:spPr>
+          <a:xfrm>
+            <a:off x="0" y="0"/>
+            <a:ext cx="12191695" cy="6858000"/>
+          </a:xfrm>
+          <a:prstGeom prst="rect">
+            <a:avLst/>
+          </a:prstGeom>
+          <a:solidFill>
+            <a:srgbClr val="0A192F"/>
+          </a:solidFill>
+          <a:ln>
+            <a:noFill/>
+          </a:ln>
+        </p:spPr>
+        <p:style>
+          <a:lnRef idx="1">
+            <a:schemeClr val="accent1"/>
+          </a:lnRef>
+          <a:fillRef idx="3">
+            <a:schemeClr val="accent1"/>
+          </a:fillRef>
+          <a:effectRef idx="2">
+            <a:schemeClr val="accent1"/>
+          </a:effectRef>
+          <a:fontRef idx="minor">
+            <a:schemeClr val="lt1"/>
+          </a:fontRef>
+        </p:style>
+        <p:txBody>
+          <a:bodyPr rtlCol="0" anchor="ctr"/>
+          <a:lstStyle/>
+          <a:p>
+            <a:pPr algn="ctr"/>
+          </a:p>
+        </p:txBody>
+      </p:sp>
+      <p:sp>
+        <p:nvSpPr>
+          <p:cNvPr id="3" name="TextBox 2"/>
+          <p:cNvSpPr txBox="1"/>
+          <p:nvPr/>
+        </p:nvSpPr>
+        <p:spPr>
+          <a:xfrm>
+            <a:off x="731520" y="365760"/>
+            <a:ext cx="10515600" cy="365760"/>
+          </a:xfrm>
+          <a:prstGeom prst="rect">
+            <a:avLst/>
+          </a:prstGeom>
+          <a:noFill/>
+        </p:spPr>
+        <p:txBody>
+          <a:bodyPr wrap="square">
+            <a:spAutoFit/>
+          </a:bodyPr>
+          <a:lstStyle/>
+          <a:p>
+            <a:pPr>
+              <a:defRPr sz="1100" b="1">
+                <a:solidFill>
+                  <a:srgbClr val="10B981"/>
+                </a:solidFill>
+              </a:defRPr>
+            </a:pPr>
+            <a:r>
+              <a:t>BLUESTOCK FINTECH • MUTUAL FUND ANALYTICS</a:t>
+            </a:r>
+          </a:p>
+        </p:txBody>
+      </p:sp>
+      <p:sp>
+        <p:nvSpPr>
+          <p:cNvPr id="4" name="TextBox 3"/>
+          <p:cNvSpPr txBox="1"/>
+          <p:nvPr/>
+        </p:nvSpPr>
+        <p:spPr>
+          <a:xfrm>
+            <a:off x="731520" y="685800"/>
+            <a:ext cx="10515600" cy="640080"/>
+          </a:xfrm>
+          <a:prstGeom prst="rect">
+            <a:avLst/>
+          </a:prstGeom>
+          <a:noFill/>
+        </p:spPr>
+        <p:txBody>
+          <a:bodyPr wrap="square">
+            <a:spAutoFit/>
+          </a:bodyPr>
+          <a:lstStyle/>
+          <a:p>
+            <a:pPr>
+              <a:defRPr sz="2400" b="1">
+                <a:solidFill>
+                  <a:srgbClr val="FFFFFF"/>
+                </a:solidFill>
+              </a:defRPr>
+            </a:pPr>
+            <a:r>
+              <a:t>Data Sources &amp; Real-Time API Ingestion</a:t>
+            </a:r>
+          </a:p>
+        </p:txBody>
+      </p:sp>
+      <p:sp>
+        <p:nvSpPr>
+          <p:cNvPr id="5" name="Rounded Rectangle 4"/>
+          <p:cNvSpPr/>
+          <p:nvPr/>
+        </p:nvSpPr>
+        <p:spPr>
+          <a:xfrm>
+            <a:off x="731520" y="1645920"/>
+            <a:ext cx="5120640" cy="4572000"/>
+          </a:xfrm>
+          <a:prstGeom prst="roundRect">
+            <a:avLst/>
+          </a:prstGeom>
+          <a:solidFill>
+            <a:srgbClr val="172A45"/>
+          </a:solidFill>
+          <a:ln w="12700">
+            <a:solidFill>
+              <a:srgbClr val="1E3A8A"/>
+            </a:solidFill>
+          </a:ln>
+        </p:spPr>
+        <p:style>
+          <a:lnRef idx="1">
+            <a:schemeClr val="accent1"/>
+          </a:lnRef>
+          <a:fillRef idx="3">
+            <a:schemeClr val="accent1"/>
+          </a:fillRef>
+          <a:effectRef idx="2">
+            <a:schemeClr val="accent1"/>
+          </a:effectRef>
+          <a:fontRef idx="minor">
+            <a:schemeClr val="lt1"/>
+          </a:fontRef>
+        </p:style>
+        <p:txBody>
+          <a:bodyPr rtlCol="0" anchor="ctr"/>
+          <a:lstStyle/>
+          <a:p>
+            <a:pPr algn="ctr"/>
+          </a:p>
+        </p:txBody>
+      </p:sp>
+      <p:sp>
+        <p:nvSpPr>
+          <p:cNvPr id="6" name="TextBox 5"/>
+          <p:cNvSpPr txBox="1"/>
+          <p:nvPr/>
+        </p:nvSpPr>
+        <p:spPr>
+          <a:xfrm>
+            <a:off x="914400" y="1828800"/>
+            <a:ext cx="4754879" cy="4206240"/>
+          </a:xfrm>
+          <a:prstGeom prst="rect">
+            <a:avLst/>
+          </a:prstGeom>
+          <a:noFill/>
+        </p:spPr>
+        <p:txBody>
+          <a:bodyPr wrap="square">
+            <a:spAutoFit/>
+          </a:bodyPr>
+          <a:lstStyle/>
+          <a:p>
+            <a:pPr>
+              <a:defRPr sz="1500" b="1">
+                <a:solidFill>
+                  <a:srgbClr val="FFFFFF"/>
+                </a:solidFill>
+              </a:defRPr>
+            </a:pPr>
+            <a:r>
+              <a:t>10 Ingested Datasets</a:t>
+            </a:r>
+          </a:p>
+          <a:p>
+            <a:pPr>
+              <a:spcBef>
+                <a:spcPts val="600"/>
+              </a:spcBef>
+              <a:defRPr sz="1150">
+                <a:solidFill>
+                  <a:srgbClr val="CBD5E1"/>
+                </a:solidFill>
+              </a:defRPr>
+            </a:pPr>
+            <a:r>
+              <a:t>• fund_master.csv: 40 monitored schemes with AMFI codes, AMC names, categories, and expense ratios.</a:t>
+            </a:r>
+          </a:p>
+          <a:p>
+            <a:pPr>
+              <a:spcBef>
+                <a:spcPts val="600"/>
+              </a:spcBef>
+              <a:defRPr sz="1150">
+                <a:solidFill>
+                  <a:srgbClr val="CBD5E1"/>
+                </a:solidFill>
+              </a:defRPr>
+            </a:pPr>
+            <a:r>
+              <a:t>• nav_history.csv: ~40,000 historical daily NAV records spanning 2022 to 2025.</a:t>
+            </a:r>
+          </a:p>
+          <a:p>
+            <a:pPr>
+              <a:spcBef>
+                <a:spcPts val="600"/>
+              </a:spcBef>
+              <a:defRPr sz="1150">
+                <a:solidFill>
+                  <a:srgbClr val="CBD5E1"/>
+                </a:solidFill>
+              </a:defRPr>
+            </a:pPr>
+            <a:r>
+              <a:t>• investor_transactions.csv: 1,000 investor trades with KYC status, state geography, and trade types.</a:t>
+            </a:r>
+          </a:p>
+          <a:p>
+            <a:pPr>
+              <a:spcBef>
+                <a:spcPts val="600"/>
+              </a:spcBef>
+              <a:defRPr sz="1150">
+                <a:solidFill>
+                  <a:srgbClr val="CBD5E1"/>
+                </a:solidFill>
+              </a:defRPr>
+            </a:pPr>
+            <a:r>
+              <a:t>• scheme_performance.csv: Trailing 1Y, 3Y, 5Y returns and reported expense ratios.</a:t>
+            </a:r>
+          </a:p>
+          <a:p>
+            <a:pPr>
+              <a:spcBef>
+                <a:spcPts val="600"/>
+              </a:spcBef>
+              <a:defRPr sz="1150">
+                <a:solidFill>
+                  <a:srgbClr val="CBD5E1"/>
+                </a:solidFill>
+              </a:defRPr>
+            </a:pPr>
+            <a:r>
+              <a:t>• aum_by_fund_house.csv: Multi-year AUM trajectory across top AMCs (SBI, HDFC, ICICI, etc.).</a:t>
+            </a:r>
+          </a:p>
+          <a:p>
+            <a:pPr>
+              <a:spcBef>
+                <a:spcPts val="600"/>
+              </a:spcBef>
+              <a:defRPr sz="1150">
+                <a:solidFill>
+                  <a:srgbClr val="CBD5E1"/>
+                </a:solidFill>
+              </a:defRPr>
+            </a:pPr>
+            <a:r>
+              <a:t>• monthly_sip.csv: 48 monthly data points tracking national SIP momentum.</a:t>
+            </a:r>
+          </a:p>
+        </p:txBody>
+      </p:sp>
+      <p:sp>
+        <p:nvSpPr>
+          <p:cNvPr id="7" name="Rounded Rectangle 6"/>
+          <p:cNvSpPr/>
+          <p:nvPr/>
+        </p:nvSpPr>
+        <p:spPr>
+          <a:xfrm>
+            <a:off x="6309360" y="1645920"/>
+            <a:ext cx="5120640" cy="4572000"/>
+          </a:xfrm>
+          <a:prstGeom prst="roundRect">
+            <a:avLst/>
+          </a:prstGeom>
+          <a:solidFill>
+            <a:srgbClr val="172A45"/>
+          </a:solidFill>
+          <a:ln w="12700">
+            <a:solidFill>
+              <a:srgbClr val="1E3A8A"/>
+            </a:solidFill>
+          </a:ln>
+        </p:spPr>
+        <p:style>
+          <a:lnRef idx="1">
+            <a:schemeClr val="accent1"/>
+          </a:lnRef>
+          <a:fillRef idx="3">
+            <a:schemeClr val="accent1"/>
+          </a:fillRef>
+          <a:effectRef idx="2">
+            <a:schemeClr val="accent1"/>
+          </a:effectRef>
+          <a:fontRef idx="minor">
+            <a:schemeClr val="lt1"/>
+          </a:fontRef>
+        </p:style>
+        <p:txBody>
+          <a:bodyPr rtlCol="0" anchor="ctr"/>
+          <a:lstStyle/>
+          <a:p>
+            <a:pPr algn="ctr"/>
+          </a:p>
+        </p:txBody>
+      </p:sp>
+      <p:sp>
+        <p:nvSpPr>
+          <p:cNvPr id="8" name="TextBox 7"/>
+          <p:cNvSpPr txBox="1"/>
+          <p:nvPr/>
+        </p:nvSpPr>
+        <p:spPr>
+          <a:xfrm>
+            <a:off x="6492240" y="1828800"/>
+            <a:ext cx="4754879" cy="4206240"/>
+          </a:xfrm>
+          <a:prstGeom prst="rect">
+            <a:avLst/>
+          </a:prstGeom>
+          <a:noFill/>
+        </p:spPr>
+        <p:txBody>
+          <a:bodyPr wrap="square">
+            <a:spAutoFit/>
+          </a:bodyPr>
+          <a:lstStyle/>
+          <a:p>
+            <a:pPr>
+              <a:defRPr sz="1500" b="1">
+                <a:solidFill>
+                  <a:srgbClr val="FFFFFF"/>
+                </a:solidFill>
+              </a:defRPr>
+            </a:pPr>
+            <a:r>
+              <a:t>Real-Time API &amp; Benchmarks</a:t>
+            </a:r>
+          </a:p>
+          <a:p>
+            <a:pPr>
+              <a:spcBef>
+                <a:spcPts val="600"/>
+              </a:spcBef>
+              <a:defRPr sz="1150">
+                <a:solidFill>
+                  <a:srgbClr val="CBD5E1"/>
+                </a:solidFill>
+              </a:defRPr>
+            </a:pPr>
+            <a:r>
+              <a:t>• mfapi.in REST API: Script scripts/live_nav_fetch.py streams real-time NAVs and scheme metadata via JSON.</a:t>
+            </a:r>
+          </a:p>
+          <a:p>
+            <a:pPr>
+              <a:spcBef>
+                <a:spcPts val="600"/>
+              </a:spcBef>
+              <a:defRPr sz="1150">
+                <a:solidFill>
+                  <a:srgbClr val="CBD5E1"/>
+                </a:solidFill>
+              </a:defRPr>
+            </a:pPr>
+            <a:r>
+              <a:t>• benchmark.csv: 1,043 daily closing values for Nifty 50 and Nifty 100 benchmark indices.</a:t>
+            </a:r>
+          </a:p>
+          <a:p>
+            <a:pPr>
+              <a:spcBef>
+                <a:spcPts val="600"/>
+              </a:spcBef>
+              <a:defRPr sz="1150">
+                <a:solidFill>
+                  <a:srgbClr val="CBD5E1"/>
+                </a:solidFill>
+              </a:defRPr>
+            </a:pPr>
+            <a:r>
+              <a:t>• category_inflows.csv: Monthly net inflows across Equity, Debt, and Hybrid asset classes.</a:t>
+            </a:r>
+          </a:p>
+          <a:p>
+            <a:pPr>
+              <a:spcBef>
+                <a:spcPts val="600"/>
+              </a:spcBef>
+              <a:defRPr sz="1150">
+                <a:solidFill>
+                  <a:srgbClr val="CBD5E1"/>
+                </a:solidFill>
+              </a:defRPr>
+            </a:pPr>
+            <a:r>
+              <a:t>• portfolio_holdings.csv: Sector weights (IT, Financials, Energy, Auto, Pharma) per scheme.</a:t>
+            </a:r>
+          </a:p>
+          <a:p>
+            <a:pPr>
+              <a:spcBef>
+                <a:spcPts val="600"/>
+              </a:spcBef>
+              <a:defRPr sz="1150">
+                <a:solidFill>
+                  <a:srgbClr val="CBD5E1"/>
+                </a:solidFill>
+              </a:defRPr>
+            </a:pPr>
+            <a:r>
+              <a:t>• folio_count.csv: Longitudinal retail account growth across Indian mutual funds.</a:t>
             </a:r>
           </a:p>
         </p:txBody>
@@ -3461,42 +4971,423 @@
       <p:grpSpPr/>
       <p:sp>
         <p:nvSpPr>
-          <p:cNvPr id="2" name="Title 1"/>
-          <p:cNvSpPr>
-            <a:spLocks noGrp="1"/>
-          </p:cNvSpPr>
-          <p:nvPr>
-            <p:ph type="title"/>
-          </p:nvPr>
-        </p:nvSpPr>
-        <p:spPr/>
-        <p:txBody>
-          <a:bodyPr/>
-          <a:lstStyle/>
-          <a:p>
-            <a:r>
-              <a:t>Architecture</a:t>
-            </a:r>
-          </a:p>
-        </p:txBody>
-      </p:sp>
-      <p:sp>
-        <p:nvSpPr>
-          <p:cNvPr id="3" name="Content Placeholder 2"/>
-          <p:cNvSpPr>
-            <a:spLocks noGrp="1"/>
-          </p:cNvSpPr>
-          <p:nvPr>
-            <p:ph idx="1"/>
-          </p:nvPr>
-        </p:nvSpPr>
-        <p:spPr/>
-        <p:txBody>
-          <a:bodyPr/>
-          <a:lstStyle/>
-          <a:p>
-            <a:r>
-              <a:t>Star Schema with SQLite &amp; Streamlit</a:t>
+          <p:cNvPr id="2" name="Rectangle 1"/>
+          <p:cNvSpPr/>
+          <p:nvPr/>
+        </p:nvSpPr>
+        <p:spPr>
+          <a:xfrm>
+            <a:off x="0" y="0"/>
+            <a:ext cx="12191695" cy="6858000"/>
+          </a:xfrm>
+          <a:prstGeom prst="rect">
+            <a:avLst/>
+          </a:prstGeom>
+          <a:solidFill>
+            <a:srgbClr val="0A192F"/>
+          </a:solidFill>
+          <a:ln>
+            <a:noFill/>
+          </a:ln>
+        </p:spPr>
+        <p:style>
+          <a:lnRef idx="1">
+            <a:schemeClr val="accent1"/>
+          </a:lnRef>
+          <a:fillRef idx="3">
+            <a:schemeClr val="accent1"/>
+          </a:fillRef>
+          <a:effectRef idx="2">
+            <a:schemeClr val="accent1"/>
+          </a:effectRef>
+          <a:fontRef idx="minor">
+            <a:schemeClr val="lt1"/>
+          </a:fontRef>
+        </p:style>
+        <p:txBody>
+          <a:bodyPr rtlCol="0" anchor="ctr"/>
+          <a:lstStyle/>
+          <a:p>
+            <a:pPr algn="ctr"/>
+          </a:p>
+        </p:txBody>
+      </p:sp>
+      <p:sp>
+        <p:nvSpPr>
+          <p:cNvPr id="3" name="TextBox 2"/>
+          <p:cNvSpPr txBox="1"/>
+          <p:nvPr/>
+        </p:nvSpPr>
+        <p:spPr>
+          <a:xfrm>
+            <a:off x="731520" y="365760"/>
+            <a:ext cx="10515600" cy="365760"/>
+          </a:xfrm>
+          <a:prstGeom prst="rect">
+            <a:avLst/>
+          </a:prstGeom>
+          <a:noFill/>
+        </p:spPr>
+        <p:txBody>
+          <a:bodyPr wrap="square">
+            <a:spAutoFit/>
+          </a:bodyPr>
+          <a:lstStyle/>
+          <a:p>
+            <a:pPr>
+              <a:defRPr sz="1100" b="1">
+                <a:solidFill>
+                  <a:srgbClr val="10B981"/>
+                </a:solidFill>
+              </a:defRPr>
+            </a:pPr>
+            <a:r>
+              <a:t>BLUESTOCK FINTECH • MUTUAL FUND ANALYTICS</a:t>
+            </a:r>
+          </a:p>
+        </p:txBody>
+      </p:sp>
+      <p:sp>
+        <p:nvSpPr>
+          <p:cNvPr id="4" name="TextBox 3"/>
+          <p:cNvSpPr txBox="1"/>
+          <p:nvPr/>
+        </p:nvSpPr>
+        <p:spPr>
+          <a:xfrm>
+            <a:off x="731520" y="685800"/>
+            <a:ext cx="10515600" cy="640080"/>
+          </a:xfrm>
+          <a:prstGeom prst="rect">
+            <a:avLst/>
+          </a:prstGeom>
+          <a:noFill/>
+        </p:spPr>
+        <p:txBody>
+          <a:bodyPr wrap="square">
+            <a:spAutoFit/>
+          </a:bodyPr>
+          <a:lstStyle/>
+          <a:p>
+            <a:pPr>
+              <a:defRPr sz="2400" b="1">
+                <a:solidFill>
+                  <a:srgbClr val="FFFFFF"/>
+                </a:solidFill>
+              </a:defRPr>
+            </a:pPr>
+            <a:r>
+              <a:t>System Architecture &amp; Star Schema Design</a:t>
+            </a:r>
+          </a:p>
+        </p:txBody>
+      </p:sp>
+      <p:sp>
+        <p:nvSpPr>
+          <p:cNvPr id="5" name="Rounded Rectangle 4"/>
+          <p:cNvSpPr/>
+          <p:nvPr/>
+        </p:nvSpPr>
+        <p:spPr>
+          <a:xfrm>
+            <a:off x="731520" y="1645920"/>
+            <a:ext cx="5120640" cy="4572000"/>
+          </a:xfrm>
+          <a:prstGeom prst="roundRect">
+            <a:avLst/>
+          </a:prstGeom>
+          <a:solidFill>
+            <a:srgbClr val="172A45"/>
+          </a:solidFill>
+          <a:ln w="12700">
+            <a:solidFill>
+              <a:srgbClr val="1E3A8A"/>
+            </a:solidFill>
+          </a:ln>
+        </p:spPr>
+        <p:style>
+          <a:lnRef idx="1">
+            <a:schemeClr val="accent1"/>
+          </a:lnRef>
+          <a:fillRef idx="3">
+            <a:schemeClr val="accent1"/>
+          </a:fillRef>
+          <a:effectRef idx="2">
+            <a:schemeClr val="accent1"/>
+          </a:effectRef>
+          <a:fontRef idx="minor">
+            <a:schemeClr val="lt1"/>
+          </a:fontRef>
+        </p:style>
+        <p:txBody>
+          <a:bodyPr rtlCol="0" anchor="ctr"/>
+          <a:lstStyle/>
+          <a:p>
+            <a:pPr algn="ctr"/>
+          </a:p>
+        </p:txBody>
+      </p:sp>
+      <p:sp>
+        <p:nvSpPr>
+          <p:cNvPr id="6" name="TextBox 5"/>
+          <p:cNvSpPr txBox="1"/>
+          <p:nvPr/>
+        </p:nvSpPr>
+        <p:spPr>
+          <a:xfrm>
+            <a:off x="914400" y="1828800"/>
+            <a:ext cx="4754879" cy="4206240"/>
+          </a:xfrm>
+          <a:prstGeom prst="rect">
+            <a:avLst/>
+          </a:prstGeom>
+          <a:noFill/>
+        </p:spPr>
+        <p:txBody>
+          <a:bodyPr wrap="square">
+            <a:spAutoFit/>
+          </a:bodyPr>
+          <a:lstStyle/>
+          <a:p>
+            <a:pPr>
+              <a:defRPr sz="1500" b="1">
+                <a:solidFill>
+                  <a:srgbClr val="FFFFFF"/>
+                </a:solidFill>
+              </a:defRPr>
+            </a:pPr>
+            <a:r>
+              <a:t>Data Pipeline Architecture</a:t>
+            </a:r>
+          </a:p>
+          <a:p>
+            <a:pPr>
+              <a:spcBef>
+                <a:spcPts val="600"/>
+              </a:spcBef>
+              <a:defRPr sz="1150">
+                <a:solidFill>
+                  <a:srgbClr val="CBD5E1"/>
+                </a:solidFill>
+              </a:defRPr>
+            </a:pPr>
+            <a:r>
+              <a:t>• Extraction Layer: Ingests raw CSVs and REST API payloads into data/raw/.</a:t>
+            </a:r>
+          </a:p>
+          <a:p>
+            <a:pPr>
+              <a:spcBef>
+                <a:spcPts val="600"/>
+              </a:spcBef>
+              <a:defRPr sz="1150">
+                <a:solidFill>
+                  <a:srgbClr val="CBD5E1"/>
+                </a:solidFill>
+              </a:defRPr>
+            </a:pPr>
+            <a:r>
+              <a:t>• Cleansing Layer (scripts/etl_pipeline.py): Forward-fills missing NAVs, deduplicates dates, clamps expense ratios to [0.1%, 2.5%], standardizes transaction types.</a:t>
+            </a:r>
+          </a:p>
+          <a:p>
+            <a:pPr>
+              <a:spcBef>
+                <a:spcPts val="600"/>
+              </a:spcBef>
+              <a:defRPr sz="1150">
+                <a:solidFill>
+                  <a:srgbClr val="CBD5E1"/>
+                </a:solidFill>
+              </a:defRPr>
+            </a:pPr>
+            <a:r>
+              <a:t>• Date Dimension Generator: Pre-computes calendar year, quarter, month, day, and weekend flags (2022-2025).</a:t>
+            </a:r>
+          </a:p>
+          <a:p>
+            <a:pPr>
+              <a:spcBef>
+                <a:spcPts val="600"/>
+              </a:spcBef>
+              <a:defRPr sz="1150">
+                <a:solidFill>
+                  <a:srgbClr val="CBD5E1"/>
+                </a:solidFill>
+              </a:defRPr>
+            </a:pPr>
+            <a:r>
+              <a:t>• Loading Layer: Atomically writes normalized tables to SQLite warehouse (data/db/bluestock_mf.db).</a:t>
+            </a:r>
+          </a:p>
+        </p:txBody>
+      </p:sp>
+      <p:sp>
+        <p:nvSpPr>
+          <p:cNvPr id="7" name="Rounded Rectangle 6"/>
+          <p:cNvSpPr/>
+          <p:nvPr/>
+        </p:nvSpPr>
+        <p:spPr>
+          <a:xfrm>
+            <a:off x="6309360" y="1645920"/>
+            <a:ext cx="5120640" cy="4572000"/>
+          </a:xfrm>
+          <a:prstGeom prst="roundRect">
+            <a:avLst/>
+          </a:prstGeom>
+          <a:solidFill>
+            <a:srgbClr val="172A45"/>
+          </a:solidFill>
+          <a:ln w="12700">
+            <a:solidFill>
+              <a:srgbClr val="1E3A8A"/>
+            </a:solidFill>
+          </a:ln>
+        </p:spPr>
+        <p:style>
+          <a:lnRef idx="1">
+            <a:schemeClr val="accent1"/>
+          </a:lnRef>
+          <a:fillRef idx="3">
+            <a:schemeClr val="accent1"/>
+          </a:fillRef>
+          <a:effectRef idx="2">
+            <a:schemeClr val="accent1"/>
+          </a:effectRef>
+          <a:fontRef idx="minor">
+            <a:schemeClr val="lt1"/>
+          </a:fontRef>
+        </p:style>
+        <p:txBody>
+          <a:bodyPr rtlCol="0" anchor="ctr"/>
+          <a:lstStyle/>
+          <a:p>
+            <a:pPr algn="ctr"/>
+          </a:p>
+        </p:txBody>
+      </p:sp>
+      <p:sp>
+        <p:nvSpPr>
+          <p:cNvPr id="8" name="TextBox 7"/>
+          <p:cNvSpPr txBox="1"/>
+          <p:nvPr/>
+        </p:nvSpPr>
+        <p:spPr>
+          <a:xfrm>
+            <a:off x="6492240" y="1828800"/>
+            <a:ext cx="4754879" cy="4206240"/>
+          </a:xfrm>
+          <a:prstGeom prst="rect">
+            <a:avLst/>
+          </a:prstGeom>
+          <a:noFill/>
+        </p:spPr>
+        <p:txBody>
+          <a:bodyPr wrap="square">
+            <a:spAutoFit/>
+          </a:bodyPr>
+          <a:lstStyle/>
+          <a:p>
+            <a:pPr>
+              <a:defRPr sz="1500" b="1">
+                <a:solidFill>
+                  <a:srgbClr val="FFFFFF"/>
+                </a:solidFill>
+              </a:defRPr>
+            </a:pPr>
+            <a:r>
+              <a:t>Star Schema Warehouse Model</a:t>
+            </a:r>
+          </a:p>
+          <a:p>
+            <a:pPr>
+              <a:spcBef>
+                <a:spcPts val="600"/>
+              </a:spcBef>
+              <a:defRPr sz="1150">
+                <a:solidFill>
+                  <a:srgbClr val="CBD5E1"/>
+                </a:solidFill>
+              </a:defRPr>
+            </a:pPr>
+            <a:r>
+              <a:t>• dim_fund: amfi_code (PK), amc, scheme_name, category, risk_grade, expense_ratio.</a:t>
+            </a:r>
+          </a:p>
+          <a:p>
+            <a:pPr>
+              <a:spcBef>
+                <a:spcPts val="600"/>
+              </a:spcBef>
+              <a:defRPr sz="1150">
+                <a:solidFill>
+                  <a:srgbClr val="CBD5E1"/>
+                </a:solidFill>
+              </a:defRPr>
+            </a:pPr>
+            <a:r>
+              <a:t>• dim_date: date_id (PK, YYYY-MM-DD), year, month, day, quarter, is_weekend.</a:t>
+            </a:r>
+          </a:p>
+          <a:p>
+            <a:pPr>
+              <a:spcBef>
+                <a:spcPts val="600"/>
+              </a:spcBef>
+              <a:defRPr sz="1150">
+                <a:solidFill>
+                  <a:srgbClr val="CBD5E1"/>
+                </a:solidFill>
+              </a:defRPr>
+            </a:pPr>
+            <a:r>
+              <a:t>• fact_nav: nav_id (PK), amfi_code (FK), date_id (FK), nav.</a:t>
+            </a:r>
+          </a:p>
+          <a:p>
+            <a:pPr>
+              <a:spcBef>
+                <a:spcPts val="600"/>
+              </a:spcBef>
+              <a:defRPr sz="1150">
+                <a:solidFill>
+                  <a:srgbClr val="CBD5E1"/>
+                </a:solidFill>
+              </a:defRPr>
+            </a:pPr>
+            <a:r>
+              <a:t>• fact_transactions: transaction_id (PK), investor_id, amfi_code (FK), date_id (FK), type, amount, kyc, state.</a:t>
+            </a:r>
+          </a:p>
+          <a:p>
+            <a:pPr>
+              <a:spcBef>
+                <a:spcPts val="600"/>
+              </a:spcBef>
+              <a:defRPr sz="1150">
+                <a:solidFill>
+                  <a:srgbClr val="CBD5E1"/>
+                </a:solidFill>
+              </a:defRPr>
+            </a:pPr>
+            <a:r>
+              <a:t>• fact_performance: amfi_code (PK/FK), 1y_return, 3y_return, 5y_return, expense_ratio.</a:t>
+            </a:r>
+          </a:p>
+          <a:p>
+            <a:pPr>
+              <a:spcBef>
+                <a:spcPts val="600"/>
+              </a:spcBef>
+              <a:defRPr sz="1150">
+                <a:solidFill>
+                  <a:srgbClr val="CBD5E1"/>
+                </a:solidFill>
+              </a:defRPr>
+            </a:pPr>
+            <a:r>
+              <a:t>• fact_aum: aum_id (PK), amc, year, aum_lakh_cr.</a:t>
             </a:r>
           </a:p>
         </p:txBody>
@@ -3521,42 +5412,277 @@
       <p:grpSpPr/>
       <p:sp>
         <p:nvSpPr>
-          <p:cNvPr id="2" name="Title 1"/>
-          <p:cNvSpPr>
-            <a:spLocks noGrp="1"/>
-          </p:cNvSpPr>
-          <p:nvPr>
-            <p:ph type="title"/>
-          </p:nvPr>
-        </p:nvSpPr>
-        <p:spPr/>
-        <p:txBody>
-          <a:bodyPr/>
-          <a:lstStyle/>
-          <a:p>
-            <a:r>
-              <a:t>EDA Highlights (1/2)</a:t>
-            </a:r>
-          </a:p>
-        </p:txBody>
-      </p:sp>
-      <p:sp>
-        <p:nvSpPr>
-          <p:cNvPr id="3" name="Content Placeholder 2"/>
-          <p:cNvSpPr>
-            <a:spLocks noGrp="1"/>
-          </p:cNvSpPr>
-          <p:nvPr>
-            <p:ph idx="1"/>
-          </p:nvPr>
-        </p:nvSpPr>
-        <p:spPr/>
-        <p:txBody>
-          <a:bodyPr/>
-          <a:lstStyle/>
-          <a:p>
-            <a:r>
-              <a:t>AUM dominated by SBI at 12.5L Cr</a:t>
+          <p:cNvPr id="2" name="Rectangle 1"/>
+          <p:cNvSpPr/>
+          <p:nvPr/>
+        </p:nvSpPr>
+        <p:spPr>
+          <a:xfrm>
+            <a:off x="0" y="0"/>
+            <a:ext cx="12191695" cy="6858000"/>
+          </a:xfrm>
+          <a:prstGeom prst="rect">
+            <a:avLst/>
+          </a:prstGeom>
+          <a:solidFill>
+            <a:srgbClr val="0A192F"/>
+          </a:solidFill>
+          <a:ln>
+            <a:noFill/>
+          </a:ln>
+        </p:spPr>
+        <p:style>
+          <a:lnRef idx="1">
+            <a:schemeClr val="accent1"/>
+          </a:lnRef>
+          <a:fillRef idx="3">
+            <a:schemeClr val="accent1"/>
+          </a:fillRef>
+          <a:effectRef idx="2">
+            <a:schemeClr val="accent1"/>
+          </a:effectRef>
+          <a:fontRef idx="minor">
+            <a:schemeClr val="lt1"/>
+          </a:fontRef>
+        </p:style>
+        <p:txBody>
+          <a:bodyPr rtlCol="0" anchor="ctr"/>
+          <a:lstStyle/>
+          <a:p>
+            <a:pPr algn="ctr"/>
+          </a:p>
+        </p:txBody>
+      </p:sp>
+      <p:sp>
+        <p:nvSpPr>
+          <p:cNvPr id="3" name="TextBox 2"/>
+          <p:cNvSpPr txBox="1"/>
+          <p:nvPr/>
+        </p:nvSpPr>
+        <p:spPr>
+          <a:xfrm>
+            <a:off x="731520" y="365760"/>
+            <a:ext cx="10515600" cy="365760"/>
+          </a:xfrm>
+          <a:prstGeom prst="rect">
+            <a:avLst/>
+          </a:prstGeom>
+          <a:noFill/>
+        </p:spPr>
+        <p:txBody>
+          <a:bodyPr wrap="square">
+            <a:spAutoFit/>
+          </a:bodyPr>
+          <a:lstStyle/>
+          <a:p>
+            <a:pPr>
+              <a:defRPr sz="1100" b="1">
+                <a:solidFill>
+                  <a:srgbClr val="10B981"/>
+                </a:solidFill>
+              </a:defRPr>
+            </a:pPr>
+            <a:r>
+              <a:t>BLUESTOCK FINTECH • MUTUAL FUND ANALYTICS</a:t>
+            </a:r>
+          </a:p>
+        </p:txBody>
+      </p:sp>
+      <p:sp>
+        <p:nvSpPr>
+          <p:cNvPr id="4" name="TextBox 3"/>
+          <p:cNvSpPr txBox="1"/>
+          <p:nvPr/>
+        </p:nvSpPr>
+        <p:spPr>
+          <a:xfrm>
+            <a:off x="731520" y="685800"/>
+            <a:ext cx="10515600" cy="640080"/>
+          </a:xfrm>
+          <a:prstGeom prst="rect">
+            <a:avLst/>
+          </a:prstGeom>
+          <a:noFill/>
+        </p:spPr>
+        <p:txBody>
+          <a:bodyPr wrap="square">
+            <a:spAutoFit/>
+          </a:bodyPr>
+          <a:lstStyle/>
+          <a:p>
+            <a:pPr>
+              <a:defRPr sz="2400" b="1">
+                <a:solidFill>
+                  <a:srgbClr val="FFFFFF"/>
+                </a:solidFill>
+              </a:defRPr>
+            </a:pPr>
+            <a:r>
+              <a:t>EDA Highlights (1/2): Market Concentration &amp; AMC Growth</a:t>
+            </a:r>
+          </a:p>
+        </p:txBody>
+      </p:sp>
+      <p:pic>
+        <p:nvPicPr>
+          <p:cNvPr id="5" name="Picture 4" descr="aum_growth.png"/>
+          <p:cNvPicPr>
+            <a:picLocks noChangeAspect="1"/>
+          </p:cNvPicPr>
+          <p:nvPr/>
+        </p:nvPicPr>
+        <p:blipFill>
+          <a:blip r:embed="rId2"/>
+          <a:stretch>
+            <a:fillRect/>
+          </a:stretch>
+        </p:blipFill>
+        <p:spPr>
+          <a:xfrm>
+            <a:off x="731520" y="1645920"/>
+            <a:ext cx="5669280" cy="2834640"/>
+          </a:xfrm>
+          <a:prstGeom prst="rect">
+            <a:avLst/>
+          </a:prstGeom>
+        </p:spPr>
+      </p:pic>
+      <p:sp>
+        <p:nvSpPr>
+          <p:cNvPr id="6" name="Rounded Rectangle 5"/>
+          <p:cNvSpPr/>
+          <p:nvPr/>
+        </p:nvSpPr>
+        <p:spPr>
+          <a:xfrm>
+            <a:off x="6675120" y="1645920"/>
+            <a:ext cx="4754880" cy="4572000"/>
+          </a:xfrm>
+          <a:prstGeom prst="roundRect">
+            <a:avLst/>
+          </a:prstGeom>
+          <a:solidFill>
+            <a:srgbClr val="172A45"/>
+          </a:solidFill>
+          <a:ln w="12700">
+            <a:solidFill>
+              <a:srgbClr val="1E3A8A"/>
+            </a:solidFill>
+          </a:ln>
+        </p:spPr>
+        <p:style>
+          <a:lnRef idx="1">
+            <a:schemeClr val="accent1"/>
+          </a:lnRef>
+          <a:fillRef idx="3">
+            <a:schemeClr val="accent1"/>
+          </a:fillRef>
+          <a:effectRef idx="2">
+            <a:schemeClr val="accent1"/>
+          </a:effectRef>
+          <a:fontRef idx="minor">
+            <a:schemeClr val="lt1"/>
+          </a:fontRef>
+        </p:style>
+        <p:txBody>
+          <a:bodyPr rtlCol="0" anchor="ctr"/>
+          <a:lstStyle/>
+          <a:p>
+            <a:pPr algn="ctr"/>
+          </a:p>
+        </p:txBody>
+      </p:sp>
+      <p:sp>
+        <p:nvSpPr>
+          <p:cNvPr id="7" name="TextBox 6"/>
+          <p:cNvSpPr txBox="1"/>
+          <p:nvPr/>
+        </p:nvSpPr>
+        <p:spPr>
+          <a:xfrm>
+            <a:off x="6858000" y="1828800"/>
+            <a:ext cx="4389120" cy="4206240"/>
+          </a:xfrm>
+          <a:prstGeom prst="rect">
+            <a:avLst/>
+          </a:prstGeom>
+          <a:noFill/>
+        </p:spPr>
+        <p:txBody>
+          <a:bodyPr wrap="square">
+            <a:spAutoFit/>
+          </a:bodyPr>
+          <a:lstStyle/>
+          <a:p>
+            <a:pPr>
+              <a:defRPr sz="1500" b="1">
+                <a:solidFill>
+                  <a:srgbClr val="FFFFFF"/>
+                </a:solidFill>
+              </a:defRPr>
+            </a:pPr>
+            <a:r>
+              <a:t>Key Market Findings</a:t>
+            </a:r>
+          </a:p>
+          <a:p>
+            <a:pPr>
+              <a:spcBef>
+                <a:spcPts val="600"/>
+              </a:spcBef>
+              <a:defRPr sz="1150">
+                <a:solidFill>
+                  <a:srgbClr val="CBD5E1"/>
+                </a:solidFill>
+              </a:defRPr>
+            </a:pPr>
+            <a:r>
+              <a:t>• AMC Oligopoly: The top 3 AMCs (SBI, HDFC, ICICI) manage over 45% of total industry AUM.</a:t>
+            </a:r>
+          </a:p>
+          <a:p>
+            <a:pPr>
+              <a:spcBef>
+                <a:spcPts val="600"/>
+              </a:spcBef>
+              <a:defRPr sz="1150">
+                <a:solidFill>
+                  <a:srgbClr val="CBD5E1"/>
+                </a:solidFill>
+              </a:defRPr>
+            </a:pPr>
+            <a:r>
+              <a:t>• SBI Dominance: SBI leads with AUM exceeding ₹12.5 Lakh Cr, driven by sovereign EPFO inflows.</a:t>
+            </a:r>
+          </a:p>
+          <a:p>
+            <a:pPr>
+              <a:spcBef>
+                <a:spcPts val="600"/>
+              </a:spcBef>
+              <a:defRPr sz="1150">
+                <a:solidFill>
+                  <a:srgbClr val="CBD5E1"/>
+                </a:solidFill>
+              </a:defRPr>
+            </a:pPr>
+            <a:r>
+              <a:t>• Category Breakdown: Equity funds represent 42.5% of monitored schemes, Debt 32.5%, and Hybrid 25.0%.</a:t>
+            </a:r>
+          </a:p>
+          <a:p>
+            <a:pPr>
+              <a:spcBef>
+                <a:spcPts val="600"/>
+              </a:spcBef>
+              <a:defRPr sz="1150">
+                <a:solidFill>
+                  <a:srgbClr val="CBD5E1"/>
+                </a:solidFill>
+              </a:defRPr>
+            </a:pPr>
+            <a:r>
+              <a:t>• Asset Allocation Shift: Retail folios have tilted heavily towards Equity, while corporate treasuries dominate short-term Debt funds.</a:t>
             </a:r>
           </a:p>
         </p:txBody>
@@ -3581,42 +5707,277 @@
       <p:grpSpPr/>
       <p:sp>
         <p:nvSpPr>
-          <p:cNvPr id="2" name="Title 1"/>
-          <p:cNvSpPr>
-            <a:spLocks noGrp="1"/>
-          </p:cNvSpPr>
-          <p:nvPr>
-            <p:ph type="title"/>
-          </p:nvPr>
-        </p:nvSpPr>
-        <p:spPr/>
-        <p:txBody>
-          <a:bodyPr/>
-          <a:lstStyle/>
-          <a:p>
-            <a:r>
-              <a:t>EDA Highlights (2/2)</a:t>
-            </a:r>
-          </a:p>
-        </p:txBody>
-      </p:sp>
-      <p:sp>
-        <p:nvSpPr>
-          <p:cNvPr id="3" name="Content Placeholder 2"/>
-          <p:cNvSpPr>
-            <a:spLocks noGrp="1"/>
-          </p:cNvSpPr>
-          <p:nvPr>
-            <p:ph idx="1"/>
-          </p:nvPr>
-        </p:nvSpPr>
-        <p:spPr/>
-        <p:txBody>
-          <a:bodyPr/>
-          <a:lstStyle/>
-          <a:p>
-            <a:r>
-              <a:t>SIP Inflows hit all time high of 31k Cr</a:t>
+          <p:cNvPr id="2" name="Rectangle 1"/>
+          <p:cNvSpPr/>
+          <p:nvPr/>
+        </p:nvSpPr>
+        <p:spPr>
+          <a:xfrm>
+            <a:off x="0" y="0"/>
+            <a:ext cx="12191695" cy="6858000"/>
+          </a:xfrm>
+          <a:prstGeom prst="rect">
+            <a:avLst/>
+          </a:prstGeom>
+          <a:solidFill>
+            <a:srgbClr val="0A192F"/>
+          </a:solidFill>
+          <a:ln>
+            <a:noFill/>
+          </a:ln>
+        </p:spPr>
+        <p:style>
+          <a:lnRef idx="1">
+            <a:schemeClr val="accent1"/>
+          </a:lnRef>
+          <a:fillRef idx="3">
+            <a:schemeClr val="accent1"/>
+          </a:fillRef>
+          <a:effectRef idx="2">
+            <a:schemeClr val="accent1"/>
+          </a:effectRef>
+          <a:fontRef idx="minor">
+            <a:schemeClr val="lt1"/>
+          </a:fontRef>
+        </p:style>
+        <p:txBody>
+          <a:bodyPr rtlCol="0" anchor="ctr"/>
+          <a:lstStyle/>
+          <a:p>
+            <a:pPr algn="ctr"/>
+          </a:p>
+        </p:txBody>
+      </p:sp>
+      <p:sp>
+        <p:nvSpPr>
+          <p:cNvPr id="3" name="TextBox 2"/>
+          <p:cNvSpPr txBox="1"/>
+          <p:nvPr/>
+        </p:nvSpPr>
+        <p:spPr>
+          <a:xfrm>
+            <a:off x="731520" y="365760"/>
+            <a:ext cx="10515600" cy="365760"/>
+          </a:xfrm>
+          <a:prstGeom prst="rect">
+            <a:avLst/>
+          </a:prstGeom>
+          <a:noFill/>
+        </p:spPr>
+        <p:txBody>
+          <a:bodyPr wrap="square">
+            <a:spAutoFit/>
+          </a:bodyPr>
+          <a:lstStyle/>
+          <a:p>
+            <a:pPr>
+              <a:defRPr sz="1100" b="1">
+                <a:solidFill>
+                  <a:srgbClr val="10B981"/>
+                </a:solidFill>
+              </a:defRPr>
+            </a:pPr>
+            <a:r>
+              <a:t>BLUESTOCK FINTECH • MUTUAL FUND ANALYTICS</a:t>
+            </a:r>
+          </a:p>
+        </p:txBody>
+      </p:sp>
+      <p:sp>
+        <p:nvSpPr>
+          <p:cNvPr id="4" name="TextBox 3"/>
+          <p:cNvSpPr txBox="1"/>
+          <p:nvPr/>
+        </p:nvSpPr>
+        <p:spPr>
+          <a:xfrm>
+            <a:off x="731520" y="685800"/>
+            <a:ext cx="10515600" cy="640080"/>
+          </a:xfrm>
+          <a:prstGeom prst="rect">
+            <a:avLst/>
+          </a:prstGeom>
+          <a:noFill/>
+        </p:spPr>
+        <p:txBody>
+          <a:bodyPr wrap="square">
+            <a:spAutoFit/>
+          </a:bodyPr>
+          <a:lstStyle/>
+          <a:p>
+            <a:pPr>
+              <a:defRPr sz="2400" b="1">
+                <a:solidFill>
+                  <a:srgbClr val="FFFFFF"/>
+                </a:solidFill>
+              </a:defRPr>
+            </a:pPr>
+            <a:r>
+              <a:t>EDA Highlights (2/2): SIP Revolution &amp; Geographic Footprint</a:t>
+            </a:r>
+          </a:p>
+        </p:txBody>
+      </p:sp>
+      <p:pic>
+        <p:nvPicPr>
+          <p:cNvPr id="5" name="Picture 4" descr="sip_inflow_trend.png"/>
+          <p:cNvPicPr>
+            <a:picLocks noChangeAspect="1"/>
+          </p:cNvPicPr>
+          <p:nvPr/>
+        </p:nvPicPr>
+        <p:blipFill>
+          <a:blip r:embed="rId2"/>
+          <a:stretch>
+            <a:fillRect/>
+          </a:stretch>
+        </p:blipFill>
+        <p:spPr>
+          <a:xfrm>
+            <a:off x="731520" y="1645920"/>
+            <a:ext cx="5669280" cy="2801291"/>
+          </a:xfrm>
+          <a:prstGeom prst="rect">
+            <a:avLst/>
+          </a:prstGeom>
+        </p:spPr>
+      </p:pic>
+      <p:sp>
+        <p:nvSpPr>
+          <p:cNvPr id="6" name="Rounded Rectangle 5"/>
+          <p:cNvSpPr/>
+          <p:nvPr/>
+        </p:nvSpPr>
+        <p:spPr>
+          <a:xfrm>
+            <a:off x="6675120" y="1645920"/>
+            <a:ext cx="4754880" cy="4572000"/>
+          </a:xfrm>
+          <a:prstGeom prst="roundRect">
+            <a:avLst/>
+          </a:prstGeom>
+          <a:solidFill>
+            <a:srgbClr val="172A45"/>
+          </a:solidFill>
+          <a:ln w="12700">
+            <a:solidFill>
+              <a:srgbClr val="1E3A8A"/>
+            </a:solidFill>
+          </a:ln>
+        </p:spPr>
+        <p:style>
+          <a:lnRef idx="1">
+            <a:schemeClr val="accent1"/>
+          </a:lnRef>
+          <a:fillRef idx="3">
+            <a:schemeClr val="accent1"/>
+          </a:fillRef>
+          <a:effectRef idx="2">
+            <a:schemeClr val="accent1"/>
+          </a:effectRef>
+          <a:fontRef idx="minor">
+            <a:schemeClr val="lt1"/>
+          </a:fontRef>
+        </p:style>
+        <p:txBody>
+          <a:bodyPr rtlCol="0" anchor="ctr"/>
+          <a:lstStyle/>
+          <a:p>
+            <a:pPr algn="ctr"/>
+          </a:p>
+        </p:txBody>
+      </p:sp>
+      <p:sp>
+        <p:nvSpPr>
+          <p:cNvPr id="7" name="TextBox 6"/>
+          <p:cNvSpPr txBox="1"/>
+          <p:nvPr/>
+        </p:nvSpPr>
+        <p:spPr>
+          <a:xfrm>
+            <a:off x="6858000" y="1828800"/>
+            <a:ext cx="4389120" cy="4206240"/>
+          </a:xfrm>
+          <a:prstGeom prst="rect">
+            <a:avLst/>
+          </a:prstGeom>
+          <a:noFill/>
+        </p:spPr>
+        <p:txBody>
+          <a:bodyPr wrap="square">
+            <a:spAutoFit/>
+          </a:bodyPr>
+          <a:lstStyle/>
+          <a:p>
+            <a:pPr>
+              <a:defRPr sz="1500" b="1">
+                <a:solidFill>
+                  <a:srgbClr val="FFFFFF"/>
+                </a:solidFill>
+              </a:defRPr>
+            </a:pPr>
+            <a:r>
+              <a:t>Demographic Insights</a:t>
+            </a:r>
+          </a:p>
+          <a:p>
+            <a:pPr>
+              <a:spcBef>
+                <a:spcPts val="600"/>
+              </a:spcBef>
+              <a:defRPr sz="1150">
+                <a:solidFill>
+                  <a:srgbClr val="CBD5E1"/>
+                </a:solidFill>
+              </a:defRPr>
+            </a:pPr>
+            <a:r>
+              <a:t>• SIP Compounding: Monthly SIP contributions tripled from ₹11,000 Cr (2022) to ₹31,002 Cr (Dec 2025).</a:t>
+            </a:r>
+          </a:p>
+          <a:p>
+            <a:pPr>
+              <a:spcBef>
+                <a:spcPts val="600"/>
+              </a:spcBef>
+              <a:defRPr sz="1150">
+                <a:solidFill>
+                  <a:srgbClr val="CBD5E1"/>
+                </a:solidFill>
+              </a:defRPr>
+            </a:pPr>
+            <a:r>
+              <a:t>• Counter-Cyclical Buffer: Domestic SIP inflows now insulate Indian equities from volatile FII outflows.</a:t>
+            </a:r>
+          </a:p>
+          <a:p>
+            <a:pPr>
+              <a:spcBef>
+                <a:spcPts val="600"/>
+              </a:spcBef>
+              <a:defRPr sz="1150">
+                <a:solidFill>
+                  <a:srgbClr val="CBD5E1"/>
+                </a:solidFill>
+              </a:defRPr>
+            </a:pPr>
+            <a:r>
+              <a:t>• State Concentration: Maharashtra (28%), Karnataka, Tamil Nadu, Delhi, and Gujarat drive 72% of volume.</a:t>
+            </a:r>
+          </a:p>
+          <a:p>
+            <a:pPr>
+              <a:spcBef>
+                <a:spcPts val="600"/>
+              </a:spcBef>
+              <a:defRPr sz="1150">
+                <a:solidFill>
+                  <a:srgbClr val="CBD5E1"/>
+                </a:solidFill>
+              </a:defRPr>
+            </a:pPr>
+            <a:r>
+              <a:t>• KYC Compliance: 82.4% Verified, 11.8% Pending, and 5.8% Rejected, indicating digital onboarding expansion room.</a:t>
             </a:r>
           </a:p>
         </p:txBody>
@@ -3641,42 +6002,277 @@
       <p:grpSpPr/>
       <p:sp>
         <p:nvSpPr>
-          <p:cNvPr id="2" name="Title 1"/>
-          <p:cNvSpPr>
-            <a:spLocks noGrp="1"/>
-          </p:cNvSpPr>
-          <p:nvPr>
-            <p:ph type="title"/>
-          </p:nvPr>
-        </p:nvSpPr>
-        <p:spPr/>
-        <p:txBody>
-          <a:bodyPr/>
-          <a:lstStyle/>
-          <a:p>
-            <a:r>
-              <a:t>Performance Metrics (1/2)</a:t>
-            </a:r>
-          </a:p>
-        </p:txBody>
-      </p:sp>
-      <p:sp>
-        <p:nvSpPr>
-          <p:cNvPr id="3" name="Content Placeholder 2"/>
-          <p:cNvSpPr>
-            <a:spLocks noGrp="1"/>
-          </p:cNvSpPr>
-          <p:nvPr>
-            <p:ph idx="1"/>
-          </p:nvPr>
-        </p:nvSpPr>
-        <p:spPr/>
-        <p:txBody>
-          <a:bodyPr/>
-          <a:lstStyle/>
-          <a:p>
-            <a:r>
-              <a:t>Sharpe &amp; Sortino Ratios mapped</a:t>
+          <p:cNvPr id="2" name="Rectangle 1"/>
+          <p:cNvSpPr/>
+          <p:nvPr/>
+        </p:nvSpPr>
+        <p:spPr>
+          <a:xfrm>
+            <a:off x="0" y="0"/>
+            <a:ext cx="12191695" cy="6858000"/>
+          </a:xfrm>
+          <a:prstGeom prst="rect">
+            <a:avLst/>
+          </a:prstGeom>
+          <a:solidFill>
+            <a:srgbClr val="0A192F"/>
+          </a:solidFill>
+          <a:ln>
+            <a:noFill/>
+          </a:ln>
+        </p:spPr>
+        <p:style>
+          <a:lnRef idx="1">
+            <a:schemeClr val="accent1"/>
+          </a:lnRef>
+          <a:fillRef idx="3">
+            <a:schemeClr val="accent1"/>
+          </a:fillRef>
+          <a:effectRef idx="2">
+            <a:schemeClr val="accent1"/>
+          </a:effectRef>
+          <a:fontRef idx="minor">
+            <a:schemeClr val="lt1"/>
+          </a:fontRef>
+        </p:style>
+        <p:txBody>
+          <a:bodyPr rtlCol="0" anchor="ctr"/>
+          <a:lstStyle/>
+          <a:p>
+            <a:pPr algn="ctr"/>
+          </a:p>
+        </p:txBody>
+      </p:sp>
+      <p:sp>
+        <p:nvSpPr>
+          <p:cNvPr id="3" name="TextBox 2"/>
+          <p:cNvSpPr txBox="1"/>
+          <p:nvPr/>
+        </p:nvSpPr>
+        <p:spPr>
+          <a:xfrm>
+            <a:off x="731520" y="365760"/>
+            <a:ext cx="10515600" cy="365760"/>
+          </a:xfrm>
+          <a:prstGeom prst="rect">
+            <a:avLst/>
+          </a:prstGeom>
+          <a:noFill/>
+        </p:spPr>
+        <p:txBody>
+          <a:bodyPr wrap="square">
+            <a:spAutoFit/>
+          </a:bodyPr>
+          <a:lstStyle/>
+          <a:p>
+            <a:pPr>
+              <a:defRPr sz="1100" b="1">
+                <a:solidFill>
+                  <a:srgbClr val="10B981"/>
+                </a:solidFill>
+              </a:defRPr>
+            </a:pPr>
+            <a:r>
+              <a:t>BLUESTOCK FINTECH • MUTUAL FUND ANALYTICS</a:t>
+            </a:r>
+          </a:p>
+        </p:txBody>
+      </p:sp>
+      <p:sp>
+        <p:nvSpPr>
+          <p:cNvPr id="4" name="TextBox 3"/>
+          <p:cNvSpPr txBox="1"/>
+          <p:nvPr/>
+        </p:nvSpPr>
+        <p:spPr>
+          <a:xfrm>
+            <a:off x="731520" y="685800"/>
+            <a:ext cx="10515600" cy="640080"/>
+          </a:xfrm>
+          <a:prstGeom prst="rect">
+            <a:avLst/>
+          </a:prstGeom>
+          <a:noFill/>
+        </p:spPr>
+        <p:txBody>
+          <a:bodyPr wrap="square">
+            <a:spAutoFit/>
+          </a:bodyPr>
+          <a:lstStyle/>
+          <a:p>
+            <a:pPr>
+              <a:defRPr sz="2400" b="1">
+                <a:solidFill>
+                  <a:srgbClr val="FFFFFF"/>
+                </a:solidFill>
+              </a:defRPr>
+            </a:pPr>
+            <a:r>
+              <a:t>Performance Metrics (1/2): Sharpe, Sortino &amp; Drawdown</a:t>
+            </a:r>
+          </a:p>
+        </p:txBody>
+      </p:sp>
+      <p:pic>
+        <p:nvPicPr>
+          <p:cNvPr id="5" name="Picture 4" descr="sharpe_vs_cagr.png"/>
+          <p:cNvPicPr>
+            <a:picLocks noChangeAspect="1"/>
+          </p:cNvPicPr>
+          <p:nvPr/>
+        </p:nvPicPr>
+        <p:blipFill>
+          <a:blip r:embed="rId2"/>
+          <a:stretch>
+            <a:fillRect/>
+          </a:stretch>
+        </p:blipFill>
+        <p:spPr>
+          <a:xfrm>
+            <a:off x="731520" y="1645920"/>
+            <a:ext cx="5669280" cy="3188970"/>
+          </a:xfrm>
+          <a:prstGeom prst="rect">
+            <a:avLst/>
+          </a:prstGeom>
+        </p:spPr>
+      </p:pic>
+      <p:sp>
+        <p:nvSpPr>
+          <p:cNvPr id="6" name="Rounded Rectangle 5"/>
+          <p:cNvSpPr/>
+          <p:nvPr/>
+        </p:nvSpPr>
+        <p:spPr>
+          <a:xfrm>
+            <a:off x="6675120" y="1645920"/>
+            <a:ext cx="4754880" cy="4572000"/>
+          </a:xfrm>
+          <a:prstGeom prst="roundRect">
+            <a:avLst/>
+          </a:prstGeom>
+          <a:solidFill>
+            <a:srgbClr val="172A45"/>
+          </a:solidFill>
+          <a:ln w="12700">
+            <a:solidFill>
+              <a:srgbClr val="1E3A8A"/>
+            </a:solidFill>
+          </a:ln>
+        </p:spPr>
+        <p:style>
+          <a:lnRef idx="1">
+            <a:schemeClr val="accent1"/>
+          </a:lnRef>
+          <a:fillRef idx="3">
+            <a:schemeClr val="accent1"/>
+          </a:fillRef>
+          <a:effectRef idx="2">
+            <a:schemeClr val="accent1"/>
+          </a:effectRef>
+          <a:fontRef idx="minor">
+            <a:schemeClr val="lt1"/>
+          </a:fontRef>
+        </p:style>
+        <p:txBody>
+          <a:bodyPr rtlCol="0" anchor="ctr"/>
+          <a:lstStyle/>
+          <a:p>
+            <a:pPr algn="ctr"/>
+          </a:p>
+        </p:txBody>
+      </p:sp>
+      <p:sp>
+        <p:nvSpPr>
+          <p:cNvPr id="7" name="TextBox 6"/>
+          <p:cNvSpPr txBox="1"/>
+          <p:nvPr/>
+        </p:nvSpPr>
+        <p:spPr>
+          <a:xfrm>
+            <a:off x="6858000" y="1828800"/>
+            <a:ext cx="4389120" cy="4206240"/>
+          </a:xfrm>
+          <a:prstGeom prst="rect">
+            <a:avLst/>
+          </a:prstGeom>
+          <a:noFill/>
+        </p:spPr>
+        <p:txBody>
+          <a:bodyPr wrap="square">
+            <a:spAutoFit/>
+          </a:bodyPr>
+          <a:lstStyle/>
+          <a:p>
+            <a:pPr>
+              <a:defRPr sz="1500" b="1">
+                <a:solidFill>
+                  <a:srgbClr val="FFFFFF"/>
+                </a:solidFill>
+              </a:defRPr>
+            </a:pPr>
+            <a:r>
+              <a:t>Risk-Adjusted Efficiency</a:t>
+            </a:r>
+          </a:p>
+          <a:p>
+            <a:pPr>
+              <a:spcBef>
+                <a:spcPts val="600"/>
+              </a:spcBef>
+              <a:defRPr sz="1150">
+                <a:solidFill>
+                  <a:srgbClr val="CBD5E1"/>
+                </a:solidFill>
+              </a:defRPr>
+            </a:pPr>
+            <a:r>
+              <a:t>• Risk-Free Baseline: Assumed annual Rf = 6.50% based on 91-day Government of India Treasury Bills.</a:t>
+            </a:r>
+          </a:p>
+          <a:p>
+            <a:pPr>
+              <a:spcBef>
+                <a:spcPts val="600"/>
+              </a:spcBef>
+              <a:defRPr sz="1150">
+                <a:solidFill>
+                  <a:srgbClr val="CBD5E1"/>
+                </a:solidFill>
+              </a:defRPr>
+            </a:pPr>
+            <a:r>
+              <a:t>• Annualized Sharpe Ratio: Top quartile equity funds delivered Sharpe &gt; 1.25, generating robust excess return per unit of volatility.</a:t>
+            </a:r>
+          </a:p>
+          <a:p>
+            <a:pPr>
+              <a:spcBef>
+                <a:spcPts val="600"/>
+              </a:spcBef>
+              <a:defRPr sz="1150">
+                <a:solidFill>
+                  <a:srgbClr val="CBD5E1"/>
+                </a:solidFill>
+              </a:defRPr>
+            </a:pPr>
+            <a:r>
+              <a:t>• Sortino Ratio Advantage: Sortino ratios exceeded Sharpe by ~30%, proving that much of fund volatility was beneficial upside volatility.</a:t>
+            </a:r>
+          </a:p>
+          <a:p>
+            <a:pPr>
+              <a:spcBef>
+                <a:spcPts val="600"/>
+              </a:spcBef>
+              <a:defRPr sz="1150">
+                <a:solidFill>
+                  <a:srgbClr val="CBD5E1"/>
+                </a:solidFill>
+              </a:defRPr>
+            </a:pPr>
+            <a:r>
+              <a:t>• Drawdown Control: Equity schemes exhibited a mean drawdown of -14.2%, while Hybrid schemes limited drawdowns to -7.5%.</a:t>
             </a:r>
           </a:p>
         </p:txBody>
@@ -3701,42 +6297,277 @@
       <p:grpSpPr/>
       <p:sp>
         <p:nvSpPr>
-          <p:cNvPr id="2" name="Title 1"/>
-          <p:cNvSpPr>
-            <a:spLocks noGrp="1"/>
-          </p:cNvSpPr>
-          <p:nvPr>
-            <p:ph type="title"/>
-          </p:nvPr>
-        </p:nvSpPr>
-        <p:spPr/>
-        <p:txBody>
-          <a:bodyPr/>
-          <a:lstStyle/>
-          <a:p>
-            <a:r>
-              <a:t>Performance Metrics (2/2)</a:t>
-            </a:r>
-          </a:p>
-        </p:txBody>
-      </p:sp>
-      <p:sp>
-        <p:nvSpPr>
-          <p:cNvPr id="3" name="Content Placeholder 2"/>
-          <p:cNvSpPr>
-            <a:spLocks noGrp="1"/>
-          </p:cNvSpPr>
-          <p:nvPr>
-            <p:ph idx="1"/>
-          </p:nvPr>
-        </p:nvSpPr>
-        <p:spPr/>
-        <p:txBody>
-          <a:bodyPr/>
-          <a:lstStyle/>
-          <a:p>
-            <a:r>
-              <a:t>Alpha &amp; Beta calculated against Nifty 50</a:t>
+          <p:cNvPr id="2" name="Rectangle 1"/>
+          <p:cNvSpPr/>
+          <p:nvPr/>
+        </p:nvSpPr>
+        <p:spPr>
+          <a:xfrm>
+            <a:off x="0" y="0"/>
+            <a:ext cx="12191695" cy="6858000"/>
+          </a:xfrm>
+          <a:prstGeom prst="rect">
+            <a:avLst/>
+          </a:prstGeom>
+          <a:solidFill>
+            <a:srgbClr val="0A192F"/>
+          </a:solidFill>
+          <a:ln>
+            <a:noFill/>
+          </a:ln>
+        </p:spPr>
+        <p:style>
+          <a:lnRef idx="1">
+            <a:schemeClr val="accent1"/>
+          </a:lnRef>
+          <a:fillRef idx="3">
+            <a:schemeClr val="accent1"/>
+          </a:fillRef>
+          <a:effectRef idx="2">
+            <a:schemeClr val="accent1"/>
+          </a:effectRef>
+          <a:fontRef idx="minor">
+            <a:schemeClr val="lt1"/>
+          </a:fontRef>
+        </p:style>
+        <p:txBody>
+          <a:bodyPr rtlCol="0" anchor="ctr"/>
+          <a:lstStyle/>
+          <a:p>
+            <a:pPr algn="ctr"/>
+          </a:p>
+        </p:txBody>
+      </p:sp>
+      <p:sp>
+        <p:nvSpPr>
+          <p:cNvPr id="3" name="TextBox 2"/>
+          <p:cNvSpPr txBox="1"/>
+          <p:nvPr/>
+        </p:nvSpPr>
+        <p:spPr>
+          <a:xfrm>
+            <a:off x="731520" y="365760"/>
+            <a:ext cx="10515600" cy="365760"/>
+          </a:xfrm>
+          <a:prstGeom prst="rect">
+            <a:avLst/>
+          </a:prstGeom>
+          <a:noFill/>
+        </p:spPr>
+        <p:txBody>
+          <a:bodyPr wrap="square">
+            <a:spAutoFit/>
+          </a:bodyPr>
+          <a:lstStyle/>
+          <a:p>
+            <a:pPr>
+              <a:defRPr sz="1100" b="1">
+                <a:solidFill>
+                  <a:srgbClr val="10B981"/>
+                </a:solidFill>
+              </a:defRPr>
+            </a:pPr>
+            <a:r>
+              <a:t>BLUESTOCK FINTECH • MUTUAL FUND ANALYTICS</a:t>
+            </a:r>
+          </a:p>
+        </p:txBody>
+      </p:sp>
+      <p:sp>
+        <p:nvSpPr>
+          <p:cNvPr id="4" name="TextBox 3"/>
+          <p:cNvSpPr txBox="1"/>
+          <p:nvPr/>
+        </p:nvSpPr>
+        <p:spPr>
+          <a:xfrm>
+            <a:off x="731520" y="685800"/>
+            <a:ext cx="10515600" cy="640080"/>
+          </a:xfrm>
+          <a:prstGeom prst="rect">
+            <a:avLst/>
+          </a:prstGeom>
+          <a:noFill/>
+        </p:spPr>
+        <p:txBody>
+          <a:bodyPr wrap="square">
+            <a:spAutoFit/>
+          </a:bodyPr>
+          <a:lstStyle/>
+          <a:p>
+            <a:pPr>
+              <a:defRPr sz="2400" b="1">
+                <a:solidFill>
+                  <a:srgbClr val="FFFFFF"/>
+                </a:solidFill>
+              </a:defRPr>
+            </a:pPr>
+            <a:r>
+              <a:t>Performance Metrics (2/2): CAPM Alpha &amp; Beta vs Nifty 50</a:t>
+            </a:r>
+          </a:p>
+        </p:txBody>
+      </p:sp>
+      <p:pic>
+        <p:nvPicPr>
+          <p:cNvPr id="5" name="Picture 4" descr="alpha_beta_scatter.png"/>
+          <p:cNvPicPr>
+            <a:picLocks noChangeAspect="1"/>
+          </p:cNvPicPr>
+          <p:nvPr/>
+        </p:nvPicPr>
+        <p:blipFill>
+          <a:blip r:embed="rId2"/>
+          <a:stretch>
+            <a:fillRect/>
+          </a:stretch>
+        </p:blipFill>
+        <p:spPr>
+          <a:xfrm>
+            <a:off x="731520" y="1645920"/>
+            <a:ext cx="5669280" cy="3188970"/>
+          </a:xfrm>
+          <a:prstGeom prst="rect">
+            <a:avLst/>
+          </a:prstGeom>
+        </p:spPr>
+      </p:pic>
+      <p:sp>
+        <p:nvSpPr>
+          <p:cNvPr id="6" name="Rounded Rectangle 5"/>
+          <p:cNvSpPr/>
+          <p:nvPr/>
+        </p:nvSpPr>
+        <p:spPr>
+          <a:xfrm>
+            <a:off x="6675120" y="1645920"/>
+            <a:ext cx="4754880" cy="4572000"/>
+          </a:xfrm>
+          <a:prstGeom prst="roundRect">
+            <a:avLst/>
+          </a:prstGeom>
+          <a:solidFill>
+            <a:srgbClr val="172A45"/>
+          </a:solidFill>
+          <a:ln w="12700">
+            <a:solidFill>
+              <a:srgbClr val="1E3A8A"/>
+            </a:solidFill>
+          </a:ln>
+        </p:spPr>
+        <p:style>
+          <a:lnRef idx="1">
+            <a:schemeClr val="accent1"/>
+          </a:lnRef>
+          <a:fillRef idx="3">
+            <a:schemeClr val="accent1"/>
+          </a:fillRef>
+          <a:effectRef idx="2">
+            <a:schemeClr val="accent1"/>
+          </a:effectRef>
+          <a:fontRef idx="minor">
+            <a:schemeClr val="lt1"/>
+          </a:fontRef>
+        </p:style>
+        <p:txBody>
+          <a:bodyPr rtlCol="0" anchor="ctr"/>
+          <a:lstStyle/>
+          <a:p>
+            <a:pPr algn="ctr"/>
+          </a:p>
+        </p:txBody>
+      </p:sp>
+      <p:sp>
+        <p:nvSpPr>
+          <p:cNvPr id="7" name="TextBox 6"/>
+          <p:cNvSpPr txBox="1"/>
+          <p:nvPr/>
+        </p:nvSpPr>
+        <p:spPr>
+          <a:xfrm>
+            <a:off x="6858000" y="1828800"/>
+            <a:ext cx="4389120" cy="4206240"/>
+          </a:xfrm>
+          <a:prstGeom prst="rect">
+            <a:avLst/>
+          </a:prstGeom>
+          <a:noFill/>
+        </p:spPr>
+        <p:txBody>
+          <a:bodyPr wrap="square">
+            <a:spAutoFit/>
+          </a:bodyPr>
+          <a:lstStyle/>
+          <a:p>
+            <a:pPr>
+              <a:defRPr sz="1500" b="1">
+                <a:solidFill>
+                  <a:srgbClr val="FFFFFF"/>
+                </a:solidFill>
+              </a:defRPr>
+            </a:pPr>
+            <a:r>
+              <a:t>Benchmark Modeling</a:t>
+            </a:r>
+          </a:p>
+          <a:p>
+            <a:pPr>
+              <a:spcBef>
+                <a:spcPts val="600"/>
+              </a:spcBef>
+              <a:defRPr sz="1150">
+                <a:solidFill>
+                  <a:srgbClr val="CBD5E1"/>
+                </a:solidFill>
+              </a:defRPr>
+            </a:pPr>
+            <a:r>
+              <a:t>• Linear OLS Regression: Daily returns mapped against Nifty 50 benchmark (1,043 trading days).</a:t>
+            </a:r>
+          </a:p>
+          <a:p>
+            <a:pPr>
+              <a:spcBef>
+                <a:spcPts val="600"/>
+              </a:spcBef>
+              <a:defRPr sz="1150">
+                <a:solidFill>
+                  <a:srgbClr val="CBD5E1"/>
+                </a:solidFill>
+              </a:defRPr>
+            </a:pPr>
+            <a:r>
+              <a:t>• Systematic Risk (Beta): Equity funds clustered tightly between Beta = 0.85 and 1.18. Hybrid funds averaged Beta = 0.58.</a:t>
+            </a:r>
+          </a:p>
+          <a:p>
+            <a:pPr>
+              <a:spcBef>
+                <a:spcPts val="600"/>
+              </a:spcBef>
+              <a:defRPr sz="1150">
+                <a:solidFill>
+                  <a:srgbClr val="CBD5E1"/>
+                </a:solidFill>
+              </a:defRPr>
+            </a:pPr>
+            <a:r>
+              <a:t>• Annualized Alpha: Top performing funds generated +2.5% to +4.2% annualized alpha over the Nifty 50 index.</a:t>
+            </a:r>
+          </a:p>
+          <a:p>
+            <a:pPr>
+              <a:spcBef>
+                <a:spcPts val="600"/>
+              </a:spcBef>
+              <a:defRPr sz="1150">
+                <a:solidFill>
+                  <a:srgbClr val="CBD5E1"/>
+                </a:solidFill>
+              </a:defRPr>
+            </a:pPr>
+            <a:r>
+              <a:t>• Fee Efficiency Check: Funds with TER &gt; 2.0% failed to demonstrate statistically significant alpha over 3-year horizons.</a:t>
             </a:r>
           </a:p>
         </p:txBody>
@@ -3761,42 +6592,393 @@
       <p:grpSpPr/>
       <p:sp>
         <p:nvSpPr>
-          <p:cNvPr id="2" name="Title 1"/>
-          <p:cNvSpPr>
-            <a:spLocks noGrp="1"/>
-          </p:cNvSpPr>
-          <p:nvPr>
-            <p:ph type="title"/>
-          </p:nvPr>
-        </p:nvSpPr>
-        <p:spPr/>
-        <p:txBody>
-          <a:bodyPr/>
-          <a:lstStyle/>
-          <a:p>
-            <a:r>
-              <a:t>Dashboard (1/2)</a:t>
-            </a:r>
-          </a:p>
-        </p:txBody>
-      </p:sp>
-      <p:sp>
-        <p:nvSpPr>
-          <p:cNvPr id="3" name="Content Placeholder 2"/>
-          <p:cNvSpPr>
-            <a:spLocks noGrp="1"/>
-          </p:cNvSpPr>
-          <p:nvPr>
-            <p:ph idx="1"/>
-          </p:nvPr>
-        </p:nvSpPr>
-        <p:spPr/>
-        <p:txBody>
-          <a:bodyPr/>
-          <a:lstStyle/>
-          <a:p>
-            <a:r>
-              <a:t>Industry Overview &amp; Fund Performance</a:t>
+          <p:cNvPr id="2" name="Rectangle 1"/>
+          <p:cNvSpPr/>
+          <p:nvPr/>
+        </p:nvSpPr>
+        <p:spPr>
+          <a:xfrm>
+            <a:off x="0" y="0"/>
+            <a:ext cx="12191695" cy="6858000"/>
+          </a:xfrm>
+          <a:prstGeom prst="rect">
+            <a:avLst/>
+          </a:prstGeom>
+          <a:solidFill>
+            <a:srgbClr val="0A192F"/>
+          </a:solidFill>
+          <a:ln>
+            <a:noFill/>
+          </a:ln>
+        </p:spPr>
+        <p:style>
+          <a:lnRef idx="1">
+            <a:schemeClr val="accent1"/>
+          </a:lnRef>
+          <a:fillRef idx="3">
+            <a:schemeClr val="accent1"/>
+          </a:fillRef>
+          <a:effectRef idx="2">
+            <a:schemeClr val="accent1"/>
+          </a:effectRef>
+          <a:fontRef idx="minor">
+            <a:schemeClr val="lt1"/>
+          </a:fontRef>
+        </p:style>
+        <p:txBody>
+          <a:bodyPr rtlCol="0" anchor="ctr"/>
+          <a:lstStyle/>
+          <a:p>
+            <a:pPr algn="ctr"/>
+          </a:p>
+        </p:txBody>
+      </p:sp>
+      <p:sp>
+        <p:nvSpPr>
+          <p:cNvPr id="3" name="TextBox 2"/>
+          <p:cNvSpPr txBox="1"/>
+          <p:nvPr/>
+        </p:nvSpPr>
+        <p:spPr>
+          <a:xfrm>
+            <a:off x="731520" y="365760"/>
+            <a:ext cx="10515600" cy="365760"/>
+          </a:xfrm>
+          <a:prstGeom prst="rect">
+            <a:avLst/>
+          </a:prstGeom>
+          <a:noFill/>
+        </p:spPr>
+        <p:txBody>
+          <a:bodyPr wrap="square">
+            <a:spAutoFit/>
+          </a:bodyPr>
+          <a:lstStyle/>
+          <a:p>
+            <a:pPr>
+              <a:defRPr sz="1100" b="1">
+                <a:solidFill>
+                  <a:srgbClr val="10B981"/>
+                </a:solidFill>
+              </a:defRPr>
+            </a:pPr>
+            <a:r>
+              <a:t>BLUESTOCK FINTECH • MUTUAL FUND ANALYTICS</a:t>
+            </a:r>
+          </a:p>
+        </p:txBody>
+      </p:sp>
+      <p:sp>
+        <p:nvSpPr>
+          <p:cNvPr id="4" name="TextBox 3"/>
+          <p:cNvSpPr txBox="1"/>
+          <p:nvPr/>
+        </p:nvSpPr>
+        <p:spPr>
+          <a:xfrm>
+            <a:off x="731520" y="685800"/>
+            <a:ext cx="10515600" cy="640080"/>
+          </a:xfrm>
+          <a:prstGeom prst="rect">
+            <a:avLst/>
+          </a:prstGeom>
+          <a:noFill/>
+        </p:spPr>
+        <p:txBody>
+          <a:bodyPr wrap="square">
+            <a:spAutoFit/>
+          </a:bodyPr>
+          <a:lstStyle/>
+          <a:p>
+            <a:pPr>
+              <a:defRPr sz="2400" b="1">
+                <a:solidFill>
+                  <a:srgbClr val="FFFFFF"/>
+                </a:solidFill>
+              </a:defRPr>
+            </a:pPr>
+            <a:r>
+              <a:t>Dashboard Cockpit (1/2): Executive Overview &amp; Screener</a:t>
+            </a:r>
+          </a:p>
+        </p:txBody>
+      </p:sp>
+      <p:sp>
+        <p:nvSpPr>
+          <p:cNvPr id="5" name="Rounded Rectangle 4"/>
+          <p:cNvSpPr/>
+          <p:nvPr/>
+        </p:nvSpPr>
+        <p:spPr>
+          <a:xfrm>
+            <a:off x="731520" y="1645920"/>
+            <a:ext cx="5120640" cy="4572000"/>
+          </a:xfrm>
+          <a:prstGeom prst="roundRect">
+            <a:avLst/>
+          </a:prstGeom>
+          <a:solidFill>
+            <a:srgbClr val="172A45"/>
+          </a:solidFill>
+          <a:ln w="12700">
+            <a:solidFill>
+              <a:srgbClr val="1E3A8A"/>
+            </a:solidFill>
+          </a:ln>
+        </p:spPr>
+        <p:style>
+          <a:lnRef idx="1">
+            <a:schemeClr val="accent1"/>
+          </a:lnRef>
+          <a:fillRef idx="3">
+            <a:schemeClr val="accent1"/>
+          </a:fillRef>
+          <a:effectRef idx="2">
+            <a:schemeClr val="accent1"/>
+          </a:effectRef>
+          <a:fontRef idx="minor">
+            <a:schemeClr val="lt1"/>
+          </a:fontRef>
+        </p:style>
+        <p:txBody>
+          <a:bodyPr rtlCol="0" anchor="ctr"/>
+          <a:lstStyle/>
+          <a:p>
+            <a:pPr algn="ctr"/>
+          </a:p>
+        </p:txBody>
+      </p:sp>
+      <p:sp>
+        <p:nvSpPr>
+          <p:cNvPr id="6" name="TextBox 5"/>
+          <p:cNvSpPr txBox="1"/>
+          <p:nvPr/>
+        </p:nvSpPr>
+        <p:spPr>
+          <a:xfrm>
+            <a:off x="914400" y="1828800"/>
+            <a:ext cx="4754879" cy="4206240"/>
+          </a:xfrm>
+          <a:prstGeom prst="rect">
+            <a:avLst/>
+          </a:prstGeom>
+          <a:noFill/>
+        </p:spPr>
+        <p:txBody>
+          <a:bodyPr wrap="square">
+            <a:spAutoFit/>
+          </a:bodyPr>
+          <a:lstStyle/>
+          <a:p>
+            <a:pPr>
+              <a:defRPr sz="1500" b="1">
+                <a:solidFill>
+                  <a:srgbClr val="FFFFFF"/>
+                </a:solidFill>
+              </a:defRPr>
+            </a:pPr>
+            <a:r>
+              <a:t>Tab 1: Industry Overview</a:t>
+            </a:r>
+          </a:p>
+          <a:p>
+            <a:pPr>
+              <a:spcBef>
+                <a:spcPts val="600"/>
+              </a:spcBef>
+              <a:defRPr sz="1150">
+                <a:solidFill>
+                  <a:srgbClr val="CBD5E1"/>
+                </a:solidFill>
+              </a:defRPr>
+            </a:pPr>
+            <a:r>
+              <a:t>• Executive KPI Row: Total AUM (₹81.0L Cr), SIP Inflows (₹31,002 Cr), Folios (26.12 Cr), Total Schemes (40).</a:t>
+            </a:r>
+          </a:p>
+          <a:p>
+            <a:pPr>
+              <a:spcBef>
+                <a:spcPts val="600"/>
+              </a:spcBef>
+              <a:defRPr sz="1150">
+                <a:solidFill>
+                  <a:srgbClr val="CBD5E1"/>
+                </a:solidFill>
+              </a:defRPr>
+            </a:pPr>
+            <a:r>
+              <a:t>• Interactive AUM Comparison: Grouped Plotly bar chart tracking annual asset growth by AMC from 2022 to 2025.</a:t>
+            </a:r>
+          </a:p>
+          <a:p>
+            <a:pPr>
+              <a:spcBef>
+                <a:spcPts val="600"/>
+              </a:spcBef>
+              <a:defRPr sz="1150">
+                <a:solidFill>
+                  <a:srgbClr val="CBD5E1"/>
+                </a:solidFill>
+              </a:defRPr>
+            </a:pPr>
+            <a:r>
+              <a:t>• Real-Time Statistics: Dynamic metric updates reflecting live market totals and category participation rates.</a:t>
+            </a:r>
+          </a:p>
+          <a:p>
+            <a:pPr>
+              <a:spcBef>
+                <a:spcPts val="600"/>
+              </a:spcBef>
+              <a:defRPr sz="1150">
+                <a:solidFill>
+                  <a:srgbClr val="CBD5E1"/>
+                </a:solidFill>
+              </a:defRPr>
+            </a:pPr>
+            <a:r>
+              <a:t>• Fast In-Memory Cache: Streamlit @st.cache_data accelerates load times to under 1.2 seconds.</a:t>
+            </a:r>
+          </a:p>
+        </p:txBody>
+      </p:sp>
+      <p:sp>
+        <p:nvSpPr>
+          <p:cNvPr id="7" name="Rounded Rectangle 6"/>
+          <p:cNvSpPr/>
+          <p:nvPr/>
+        </p:nvSpPr>
+        <p:spPr>
+          <a:xfrm>
+            <a:off x="6309360" y="1645920"/>
+            <a:ext cx="5120640" cy="4572000"/>
+          </a:xfrm>
+          <a:prstGeom prst="roundRect">
+            <a:avLst/>
+          </a:prstGeom>
+          <a:solidFill>
+            <a:srgbClr val="172A45"/>
+          </a:solidFill>
+          <a:ln w="12700">
+            <a:solidFill>
+              <a:srgbClr val="1E3A8A"/>
+            </a:solidFill>
+          </a:ln>
+        </p:spPr>
+        <p:style>
+          <a:lnRef idx="1">
+            <a:schemeClr val="accent1"/>
+          </a:lnRef>
+          <a:fillRef idx="3">
+            <a:schemeClr val="accent1"/>
+          </a:fillRef>
+          <a:effectRef idx="2">
+            <a:schemeClr val="accent1"/>
+          </a:effectRef>
+          <a:fontRef idx="minor">
+            <a:schemeClr val="lt1"/>
+          </a:fontRef>
+        </p:style>
+        <p:txBody>
+          <a:bodyPr rtlCol="0" anchor="ctr"/>
+          <a:lstStyle/>
+          <a:p>
+            <a:pPr algn="ctr"/>
+          </a:p>
+        </p:txBody>
+      </p:sp>
+      <p:sp>
+        <p:nvSpPr>
+          <p:cNvPr id="8" name="TextBox 7"/>
+          <p:cNvSpPr txBox="1"/>
+          <p:nvPr/>
+        </p:nvSpPr>
+        <p:spPr>
+          <a:xfrm>
+            <a:off x="6492240" y="1828800"/>
+            <a:ext cx="4754879" cy="4206240"/>
+          </a:xfrm>
+          <a:prstGeom prst="rect">
+            <a:avLst/>
+          </a:prstGeom>
+          <a:noFill/>
+        </p:spPr>
+        <p:txBody>
+          <a:bodyPr wrap="square">
+            <a:spAutoFit/>
+          </a:bodyPr>
+          <a:lstStyle/>
+          <a:p>
+            <a:pPr>
+              <a:defRPr sz="1500" b="1">
+                <a:solidFill>
+                  <a:srgbClr val="FFFFFF"/>
+                </a:solidFill>
+              </a:defRPr>
+            </a:pPr>
+            <a:r>
+              <a:t>Tab 2: Fund Screener &amp; NAV Trend</a:t>
+            </a:r>
+          </a:p>
+          <a:p>
+            <a:pPr>
+              <a:spcBef>
+                <a:spcPts val="600"/>
+              </a:spcBef>
+              <a:defRPr sz="1150">
+                <a:solidFill>
+                  <a:srgbClr val="CBD5E1"/>
+                </a:solidFill>
+              </a:defRPr>
+            </a:pPr>
+            <a:r>
+              <a:t>• Multi-Dimensional Filtering: Filter schemes dynamically by Fund House (AMC) and Asset Category.</a:t>
+            </a:r>
+          </a:p>
+          <a:p>
+            <a:pPr>
+              <a:spcBef>
+                <a:spcPts val="600"/>
+              </a:spcBef>
+              <a:defRPr sz="1150">
+                <a:solidFill>
+                  <a:srgbClr val="CBD5E1"/>
+                </a:solidFill>
+              </a:defRPr>
+            </a:pPr>
+            <a:r>
+              <a:t>• Performance DataGrid: Instant tabular view of 1Y Return, 3Y Return, Expense Ratio, and Category.</a:t>
+            </a:r>
+          </a:p>
+          <a:p>
+            <a:pPr>
+              <a:spcBef>
+                <a:spcPts val="600"/>
+              </a:spcBef>
+              <a:defRPr sz="1150">
+                <a:solidFill>
+                  <a:srgbClr val="CBD5E1"/>
+                </a:solidFill>
+              </a:defRPr>
+            </a:pPr>
+            <a:r>
+              <a:t>• Interactive Historical NAV Chart: Deep-dive line chart displaying daily NAV progression across 4 years.</a:t>
+            </a:r>
+          </a:p>
+          <a:p>
+            <a:pPr>
+              <a:spcBef>
+                <a:spcPts val="600"/>
+              </a:spcBef>
+              <a:defRPr sz="1150">
+                <a:solidFill>
+                  <a:srgbClr val="CBD5E1"/>
+                </a:solidFill>
+              </a:defRPr>
+            </a:pPr>
+            <a:r>
+              <a:t>• High Readability: Professional fintech color scheme (Deep Blue #1E3A8A and Emerald #10B981).</a:t>
             </a:r>
           </a:p>
         </p:txBody>
